--- a/public/lessons/year-6-maths/spring/week-14/divide-mixed-numbers/teaching-powerpoint-v1.pptx
+++ b/public/lessons/year-6-maths/spring/week-14/divide-mixed-numbers/teaching-powerpoint-v1.pptx
@@ -2,24 +2,24 @@
 <file path=ppt/presentation.xml><?xml version="1.0" encoding="utf-8"?>
 <p:presentation xmlns:p="http://schemas.openxmlformats.org/presentationml/2006/main">
   <p:sldMasterIdLst>
-    <p:sldMasterId xmlns:r="http://schemas.openxmlformats.org/officeDocument/2006/relationships" id="2147483648" r:id="R58e174827a1f418c"/>
+    <p:sldMasterId xmlns:r="http://schemas.openxmlformats.org/officeDocument/2006/relationships" id="2147483648" r:id="Rd9573a50b4684518"/>
   </p:sldMasterIdLst>
   <p:notesMasterIdLst>
-    <p:notesMasterId xmlns:r="http://schemas.openxmlformats.org/officeDocument/2006/relationships" r:id="R7db00b7b2a7a49a2"/>
+    <p:notesMasterId xmlns:r="http://schemas.openxmlformats.org/officeDocument/2006/relationships" r:id="Rcdae2b15be684fa1"/>
   </p:notesMasterIdLst>
   <p:sldIdLst>
-    <p:sldId xmlns:r="http://schemas.openxmlformats.org/officeDocument/2006/relationships" id="256" r:id="R76d2199e4fc848e4"/>
-    <p:sldId xmlns:r="http://schemas.openxmlformats.org/officeDocument/2006/relationships" id="257" r:id="Rd5bae7daf00741db"/>
-    <p:sldId xmlns:r="http://schemas.openxmlformats.org/officeDocument/2006/relationships" id="258" r:id="R338433864bc848eb"/>
-    <p:sldId xmlns:r="http://schemas.openxmlformats.org/officeDocument/2006/relationships" id="259" r:id="R5ba736701a5a4d29"/>
-    <p:sldId xmlns:r="http://schemas.openxmlformats.org/officeDocument/2006/relationships" id="260" r:id="R309595d1e6da4afb"/>
-    <p:sldId xmlns:r="http://schemas.openxmlformats.org/officeDocument/2006/relationships" id="261" r:id="Raeb7da7f05f448ec"/>
-    <p:sldId xmlns:r="http://schemas.openxmlformats.org/officeDocument/2006/relationships" id="262" r:id="R68130897438c4f3c"/>
-    <p:sldId xmlns:r="http://schemas.openxmlformats.org/officeDocument/2006/relationships" id="263" r:id="Rfb15c4dc6ee94f1a"/>
-    <p:sldId xmlns:r="http://schemas.openxmlformats.org/officeDocument/2006/relationships" id="264" r:id="R150c743851c141bb"/>
-    <p:sldId xmlns:r="http://schemas.openxmlformats.org/officeDocument/2006/relationships" id="265" r:id="Ra73bdc9c410848b6"/>
-    <p:sldId xmlns:r="http://schemas.openxmlformats.org/officeDocument/2006/relationships" id="266" r:id="R6c80ef5d136e4329"/>
-    <p:sldId xmlns:r="http://schemas.openxmlformats.org/officeDocument/2006/relationships" id="267" r:id="R63a277f345654a3d"/>
+    <p:sldId xmlns:r="http://schemas.openxmlformats.org/officeDocument/2006/relationships" id="256" r:id="R21ddc63b7f424bdf"/>
+    <p:sldId xmlns:r="http://schemas.openxmlformats.org/officeDocument/2006/relationships" id="257" r:id="R26b572a732f94cf7"/>
+    <p:sldId xmlns:r="http://schemas.openxmlformats.org/officeDocument/2006/relationships" id="258" r:id="R861fb8d1146b432e"/>
+    <p:sldId xmlns:r="http://schemas.openxmlformats.org/officeDocument/2006/relationships" id="259" r:id="Rdf0c0c041ec64744"/>
+    <p:sldId xmlns:r="http://schemas.openxmlformats.org/officeDocument/2006/relationships" id="260" r:id="Rbec0355f9b564559"/>
+    <p:sldId xmlns:r="http://schemas.openxmlformats.org/officeDocument/2006/relationships" id="261" r:id="Rb17e1fa0126b4bc6"/>
+    <p:sldId xmlns:r="http://schemas.openxmlformats.org/officeDocument/2006/relationships" id="262" r:id="Rb4e5e9b246f54a95"/>
+    <p:sldId xmlns:r="http://schemas.openxmlformats.org/officeDocument/2006/relationships" id="263" r:id="R2aa1eefab8604208"/>
+    <p:sldId xmlns:r="http://schemas.openxmlformats.org/officeDocument/2006/relationships" id="264" r:id="Rdca0ff2da47c4cfc"/>
+    <p:sldId xmlns:r="http://schemas.openxmlformats.org/officeDocument/2006/relationships" id="265" r:id="R4841038aa7de47a5"/>
+    <p:sldId xmlns:r="http://schemas.openxmlformats.org/officeDocument/2006/relationships" id="266" r:id="R75dfed3eb46e4d90"/>
+    <p:sldId xmlns:r="http://schemas.openxmlformats.org/officeDocument/2006/relationships" id="267" r:id="R8bd82880487d4815"/>
   </p:sldIdLst>
   <p:sldSz cx="12192000" cy="6858000"/>
   <p:notesSz cx="6858000" cy="9144000"/>
@@ -873,7 +873,7 @@
           <a:lstStyle xmlns:a="http://schemas.openxmlformats.org/drawingml/2006/main"/>
           <a:p xmlns:a="http://schemas.openxmlformats.org/drawingml/2006/main">
             <a:r>
-              <a:t>I do. Reveal the question, setup and each calculation stage one click at a time. Pupils watch before copying. Model answer: 3/4.</a:t>
+              <a:t>I do. Reveal the question, then reveal each mathematical change one click at a time. Point to the numbers and operation that changed before moving to the next line. Final answer: 3/4.</a:t>
             </a:r>
           </a:p>
         </p:txBody>
@@ -1291,7 +1291,7 @@
   </p:cSld>
   <p:clrMap bg1="lt1" tx1="dk1" bg2="lt2" tx2="dk2" accent1="accent1" accent2="accent2" accent3="accent3" accent4="accent4" accent5="accent5" accent6="accent6" hlink="hlink" folHlink="folHlink"/>
   <p:sldLayoutIdLst>
-    <p:sldLayoutId xmlns:r="http://schemas.openxmlformats.org/officeDocument/2006/relationships" id="2147483649" r:id="Re191b7fa942847fc"/>
+    <p:sldLayoutId xmlns:r="http://schemas.openxmlformats.org/officeDocument/2006/relationships" id="2147483649" r:id="Rc90c924014a34ee3"/>
   </p:sldLayoutIdLst>
   <p:txStyles>
     <p:titleStyle>
@@ -1842,7 +1842,7 @@
           <p:cNvPr id="12" name="">
             <a:extLst xmlns:a="http://schemas.openxmlformats.org/drawingml/2006/main">
               <a:ext uri="{FF2B5EF4-FFF2-40B4-BE49-F238E27FC236}">
-                <a16:creationId xmlns:a16="http://schemas.microsoft.com/office/drawing/2014/main" id="{840678CE-3E59-4CCD-AC5A-E162592584C1}"/>
+                <a16:creationId xmlns:a16="http://schemas.microsoft.com/office/drawing/2014/main" id="{B9593E6A-9FAE-4F51-8D4B-F5F6070F7901}"/>
               </a:ext>
             </a:extLst>
           </p:cNvPr>
@@ -1874,7 +1874,7 @@
           <p:cNvPr id="2" name="">
             <a:extLst xmlns:a="http://schemas.openxmlformats.org/drawingml/2006/main">
               <a:ext uri="{FF2B5EF4-FFF2-40B4-BE49-F238E27FC236}">
-                <a16:creationId xmlns:a16="http://schemas.microsoft.com/office/drawing/2014/main" id="{4698BB47-D36F-406F-8A6A-946284073173}"/>
+                <a16:creationId xmlns:a16="http://schemas.microsoft.com/office/drawing/2014/main" id="{2CA94141-4296-4CE9-9658-D8689BA030F9}"/>
               </a:ext>
             </a:extLst>
           </p:cNvPr>
@@ -1931,7 +1931,7 @@
           <p:cNvPr id="3" name="">
             <a:extLst xmlns:a="http://schemas.openxmlformats.org/drawingml/2006/main">
               <a:ext uri="{FF2B5EF4-FFF2-40B4-BE49-F238E27FC236}">
-                <a16:creationId xmlns:a16="http://schemas.microsoft.com/office/drawing/2014/main" id="{BB7DB2AE-5237-4102-97AB-6E6FA9147867}"/>
+                <a16:creationId xmlns:a16="http://schemas.microsoft.com/office/drawing/2014/main" id="{446C1E5B-516B-4E18-B59C-AAC93B503FB4}"/>
               </a:ext>
             </a:extLst>
           </p:cNvPr>
@@ -1965,7 +1965,7 @@
           <p:cNvPr id="4" name="">
             <a:extLst xmlns:a="http://schemas.openxmlformats.org/drawingml/2006/main">
               <a:ext uri="{FF2B5EF4-FFF2-40B4-BE49-F238E27FC236}">
-                <a16:creationId xmlns:a16="http://schemas.microsoft.com/office/drawing/2014/main" id="{4BAAEE34-C4D0-48D3-99EA-D27E4E3F52AA}"/>
+                <a16:creationId xmlns:a16="http://schemas.microsoft.com/office/drawing/2014/main" id="{01C2C5DE-012C-4459-B1C0-902BD0020DE4}"/>
               </a:ext>
             </a:extLst>
           </p:cNvPr>
@@ -2022,7 +2022,7 @@
           <p:cNvPr id="5" name="">
             <a:extLst xmlns:a="http://schemas.openxmlformats.org/drawingml/2006/main">
               <a:ext uri="{FF2B5EF4-FFF2-40B4-BE49-F238E27FC236}">
-                <a16:creationId xmlns:a16="http://schemas.microsoft.com/office/drawing/2014/main" id="{00D73454-D73F-4139-B552-C331DA39AEB7}"/>
+                <a16:creationId xmlns:a16="http://schemas.microsoft.com/office/drawing/2014/main" id="{B8ED768A-1C12-40E3-A9DC-C67ACBC73E7F}"/>
               </a:ext>
             </a:extLst>
           </p:cNvPr>
@@ -2079,7 +2079,7 @@
           <p:cNvPr id="6" name="">
             <a:extLst xmlns:a="http://schemas.openxmlformats.org/drawingml/2006/main">
               <a:ext uri="{FF2B5EF4-FFF2-40B4-BE49-F238E27FC236}">
-                <a16:creationId xmlns:a16="http://schemas.microsoft.com/office/drawing/2014/main" id="{CF07B148-515D-47B3-A5C5-3DC6271F92BB}"/>
+                <a16:creationId xmlns:a16="http://schemas.microsoft.com/office/drawing/2014/main" id="{EC88F687-4080-4B86-9A96-14F0C484EA48}"/>
               </a:ext>
             </a:extLst>
           </p:cNvPr>
@@ -2113,7 +2113,7 @@
           <p:cNvPr id="7" name="">
             <a:extLst xmlns:a="http://schemas.openxmlformats.org/drawingml/2006/main">
               <a:ext uri="{FF2B5EF4-FFF2-40B4-BE49-F238E27FC236}">
-                <a16:creationId xmlns:a16="http://schemas.microsoft.com/office/drawing/2014/main" id="{F8DA5243-86A2-40D1-BA53-FAE24FB5DD87}"/>
+                <a16:creationId xmlns:a16="http://schemas.microsoft.com/office/drawing/2014/main" id="{C8497C25-AC22-4FCB-AA4A-6A66D4FBB8EE}"/>
               </a:ext>
             </a:extLst>
           </p:cNvPr>
@@ -2170,7 +2170,7 @@
           <p:cNvPr id="8" name="">
             <a:extLst xmlns:a="http://schemas.openxmlformats.org/drawingml/2006/main">
               <a:ext uri="{FF2B5EF4-FFF2-40B4-BE49-F238E27FC236}">
-                <a16:creationId xmlns:a16="http://schemas.microsoft.com/office/drawing/2014/main" id="{B629B132-CB7F-427A-AE30-AC6B69570704}"/>
+                <a16:creationId xmlns:a16="http://schemas.microsoft.com/office/drawing/2014/main" id="{462646AD-8CCD-48BC-AAB2-62103A55DE42}"/>
               </a:ext>
             </a:extLst>
           </p:cNvPr>
@@ -2227,7 +2227,7 @@
           <p:cNvPr id="9" name="">
             <a:extLst xmlns:a="http://schemas.openxmlformats.org/drawingml/2006/main">
               <a:ext uri="{FF2B5EF4-FFF2-40B4-BE49-F238E27FC236}">
-                <a16:creationId xmlns:a16="http://schemas.microsoft.com/office/drawing/2014/main" id="{A8259C44-B8BA-43C3-9390-F3B1D9000B8E}"/>
+                <a16:creationId xmlns:a16="http://schemas.microsoft.com/office/drawing/2014/main" id="{81329A63-B4F6-41CA-BB45-71D419A3AEA6}"/>
               </a:ext>
             </a:extLst>
           </p:cNvPr>
@@ -2284,7 +2284,7 @@
           <p:cNvPr id="10" name="">
             <a:extLst xmlns:a="http://schemas.openxmlformats.org/drawingml/2006/main">
               <a:ext uri="{FF2B5EF4-FFF2-40B4-BE49-F238E27FC236}">
-                <a16:creationId xmlns:a16="http://schemas.microsoft.com/office/drawing/2014/main" id="{419290BD-F8F6-4087-A2EB-67F6DD8B3803}"/>
+                <a16:creationId xmlns:a16="http://schemas.microsoft.com/office/drawing/2014/main" id="{FBC7CFE8-1E29-420C-A3A5-BF52526E4E06}"/>
               </a:ext>
             </a:extLst>
           </p:cNvPr>
@@ -2341,7 +2341,7 @@
           <p:cNvPr id="11" name="">
             <a:extLst xmlns:a="http://schemas.openxmlformats.org/drawingml/2006/main">
               <a:ext uri="{FF2B5EF4-FFF2-40B4-BE49-F238E27FC236}">
-                <a16:creationId xmlns:a16="http://schemas.microsoft.com/office/drawing/2014/main" id="{708846F9-D931-4593-BFCA-6CBFFEF00F29}"/>
+                <a16:creationId xmlns:a16="http://schemas.microsoft.com/office/drawing/2014/main" id="{E446E2CF-F687-41D4-A220-9E0126AFA31A}"/>
               </a:ext>
             </a:extLst>
           </p:cNvPr>
@@ -2396,7 +2396,7 @@
     </p:spTree>
     <p:extLst>
       <p:ext uri="{BB962C8B-B14F-4D97-AF65-F5344CB8AC3E}">
-        <p14:creationId xmlns:p14="http://schemas.microsoft.com/office/powerpoint/2010/main" val="69540656"/>
+        <p14:creationId xmlns:p14="http://schemas.microsoft.com/office/powerpoint/2010/main" val="328594426"/>
       </p:ext>
     </p:extLst>
   </p:cSld>
@@ -2427,7 +2427,7 @@
           <p:cNvPr id="14" name="">
             <a:extLst xmlns:a="http://schemas.openxmlformats.org/drawingml/2006/main">
               <a:ext uri="{FF2B5EF4-FFF2-40B4-BE49-F238E27FC236}">
-                <a16:creationId xmlns:a16="http://schemas.microsoft.com/office/drawing/2014/main" id="{0275466D-F11C-4010-BF28-3984F8A5F505}"/>
+                <a16:creationId xmlns:a16="http://schemas.microsoft.com/office/drawing/2014/main" id="{D85A239D-A35E-4B20-BE54-2056EEDEDD27}"/>
               </a:ext>
             </a:extLst>
           </p:cNvPr>
@@ -2459,7 +2459,7 @@
           <p:cNvPr id="2" name="">
             <a:extLst xmlns:a="http://schemas.openxmlformats.org/drawingml/2006/main">
               <a:ext uri="{FF2B5EF4-FFF2-40B4-BE49-F238E27FC236}">
-                <a16:creationId xmlns:a16="http://schemas.microsoft.com/office/drawing/2014/main" id="{745BB459-FE37-4D94-90B1-A8001C28A280}"/>
+                <a16:creationId xmlns:a16="http://schemas.microsoft.com/office/drawing/2014/main" id="{1C72B5D6-6096-40AD-9135-711DCBC31F68}"/>
               </a:ext>
             </a:extLst>
           </p:cNvPr>
@@ -2516,7 +2516,7 @@
           <p:cNvPr id="3" name="">
             <a:extLst xmlns:a="http://schemas.openxmlformats.org/drawingml/2006/main">
               <a:ext uri="{FF2B5EF4-FFF2-40B4-BE49-F238E27FC236}">
-                <a16:creationId xmlns:a16="http://schemas.microsoft.com/office/drawing/2014/main" id="{CF3C5595-B127-4729-B173-2B82FCBD0C2C}"/>
+                <a16:creationId xmlns:a16="http://schemas.microsoft.com/office/drawing/2014/main" id="{A9D6EF94-FC11-4BD4-AFA9-3BC4E524181A}"/>
               </a:ext>
             </a:extLst>
           </p:cNvPr>
@@ -2548,7 +2548,7 @@
           <p:cNvPr id="4" name="">
             <a:extLst xmlns:a="http://schemas.openxmlformats.org/drawingml/2006/main">
               <a:ext uri="{FF2B5EF4-FFF2-40B4-BE49-F238E27FC236}">
-                <a16:creationId xmlns:a16="http://schemas.microsoft.com/office/drawing/2014/main" id="{033CA26B-9D83-4B85-829F-C9D160984CDD}"/>
+                <a16:creationId xmlns:a16="http://schemas.microsoft.com/office/drawing/2014/main" id="{F1E6EA15-179F-41D5-A28B-5563B5D6132A}"/>
               </a:ext>
             </a:extLst>
           </p:cNvPr>
@@ -2605,7 +2605,7 @@
           <p:cNvPr id="5" name="">
             <a:extLst xmlns:a="http://schemas.openxmlformats.org/drawingml/2006/main">
               <a:ext uri="{FF2B5EF4-FFF2-40B4-BE49-F238E27FC236}">
-                <a16:creationId xmlns:a16="http://schemas.microsoft.com/office/drawing/2014/main" id="{F12ACC38-807E-46B9-9055-3E1C101DFDC3}"/>
+                <a16:creationId xmlns:a16="http://schemas.microsoft.com/office/drawing/2014/main" id="{708344F9-F0FC-42EB-92AD-F5BC4ED8B85A}"/>
               </a:ext>
             </a:extLst>
           </p:cNvPr>
@@ -2662,7 +2662,7 @@
           <p:cNvPr id="6" name="">
             <a:extLst xmlns:a="http://schemas.openxmlformats.org/drawingml/2006/main">
               <a:ext uri="{FF2B5EF4-FFF2-40B4-BE49-F238E27FC236}">
-                <a16:creationId xmlns:a16="http://schemas.microsoft.com/office/drawing/2014/main" id="{B650C741-5EB3-403F-BF37-FE71049F59DD}"/>
+                <a16:creationId xmlns:a16="http://schemas.microsoft.com/office/drawing/2014/main" id="{230B82B9-420D-4D9E-A9F3-548C26E41796}"/>
               </a:ext>
             </a:extLst>
           </p:cNvPr>
@@ -2719,7 +2719,7 @@
           <p:cNvPr id="7" name="">
             <a:extLst xmlns:a="http://schemas.openxmlformats.org/drawingml/2006/main">
               <a:ext uri="{FF2B5EF4-FFF2-40B4-BE49-F238E27FC236}">
-                <a16:creationId xmlns:a16="http://schemas.microsoft.com/office/drawing/2014/main" id="{051EBB17-FE85-4B36-8840-2E13C8B8E69A}"/>
+                <a16:creationId xmlns:a16="http://schemas.microsoft.com/office/drawing/2014/main" id="{5AD5322F-FD82-4ED2-AA91-5B9689CA0BFC}"/>
               </a:ext>
             </a:extLst>
           </p:cNvPr>
@@ -2751,7 +2751,7 @@
           <p:cNvPr id="8" name="">
             <a:extLst xmlns:a="http://schemas.openxmlformats.org/drawingml/2006/main">
               <a:ext uri="{FF2B5EF4-FFF2-40B4-BE49-F238E27FC236}">
-                <a16:creationId xmlns:a16="http://schemas.microsoft.com/office/drawing/2014/main" id="{845D2671-ECA7-4308-9250-6D51D7826B05}"/>
+                <a16:creationId xmlns:a16="http://schemas.microsoft.com/office/drawing/2014/main" id="{19A460FC-8E2B-4624-95A0-A4F33B6357B1}"/>
               </a:ext>
             </a:extLst>
           </p:cNvPr>
@@ -2808,7 +2808,7 @@
           <p:cNvPr id="9" name="">
             <a:extLst xmlns:a="http://schemas.openxmlformats.org/drawingml/2006/main">
               <a:ext uri="{FF2B5EF4-FFF2-40B4-BE49-F238E27FC236}">
-                <a16:creationId xmlns:a16="http://schemas.microsoft.com/office/drawing/2014/main" id="{8EE024E2-96FA-47F6-90FE-415DE364293D}"/>
+                <a16:creationId xmlns:a16="http://schemas.microsoft.com/office/drawing/2014/main" id="{9F86482F-8CD0-4DD2-B7E7-68FE56D1C3CC}"/>
               </a:ext>
             </a:extLst>
           </p:cNvPr>
@@ -2865,7 +2865,7 @@
           <p:cNvPr id="10" name="">
             <a:extLst xmlns:a="http://schemas.openxmlformats.org/drawingml/2006/main">
               <a:ext uri="{FF2B5EF4-FFF2-40B4-BE49-F238E27FC236}">
-                <a16:creationId xmlns:a16="http://schemas.microsoft.com/office/drawing/2014/main" id="{81503AA5-C1DB-450F-A0F3-D5609678B677}"/>
+                <a16:creationId xmlns:a16="http://schemas.microsoft.com/office/drawing/2014/main" id="{88C98260-204C-4D06-8736-0A3C4EE9BC57}"/>
               </a:ext>
             </a:extLst>
           </p:cNvPr>
@@ -2922,7 +2922,7 @@
           <p:cNvPr id="11" name="">
             <a:extLst xmlns:a="http://schemas.openxmlformats.org/drawingml/2006/main">
               <a:ext uri="{FF2B5EF4-FFF2-40B4-BE49-F238E27FC236}">
-                <a16:creationId xmlns:a16="http://schemas.microsoft.com/office/drawing/2014/main" id="{E0B6612A-18E2-4095-ABFE-9B34D36EB2E0}"/>
+                <a16:creationId xmlns:a16="http://schemas.microsoft.com/office/drawing/2014/main" id="{E11420B6-0FC2-4B42-ABCA-2E5BD4A4F900}"/>
               </a:ext>
             </a:extLst>
           </p:cNvPr>
@@ -2979,7 +2979,7 @@
           <p:cNvPr id="12" name="">
             <a:extLst xmlns:a="http://schemas.openxmlformats.org/drawingml/2006/main">
               <a:ext uri="{FF2B5EF4-FFF2-40B4-BE49-F238E27FC236}">
-                <a16:creationId xmlns:a16="http://schemas.microsoft.com/office/drawing/2014/main" id="{826B549F-8301-45FA-8ABC-416220951345}"/>
+                <a16:creationId xmlns:a16="http://schemas.microsoft.com/office/drawing/2014/main" id="{0541D925-BA89-4AB1-A1C5-B217691C87FC}"/>
               </a:ext>
             </a:extLst>
           </p:cNvPr>
@@ -3036,7 +3036,7 @@
           <p:cNvPr id="13" name="">
             <a:extLst xmlns:a="http://schemas.openxmlformats.org/drawingml/2006/main">
               <a:ext uri="{FF2B5EF4-FFF2-40B4-BE49-F238E27FC236}">
-                <a16:creationId xmlns:a16="http://schemas.microsoft.com/office/drawing/2014/main" id="{B5782BB3-E58B-48B7-B9C0-C598BE4D3DC3}"/>
+                <a16:creationId xmlns:a16="http://schemas.microsoft.com/office/drawing/2014/main" id="{C4955A8F-786E-45FC-8CEF-8F6DCDBFF2E2}"/>
               </a:ext>
             </a:extLst>
           </p:cNvPr>
@@ -3091,7 +3091,7 @@
     </p:spTree>
     <p:extLst>
       <p:ext uri="{BB962C8B-B14F-4D97-AF65-F5344CB8AC3E}">
-        <p14:creationId xmlns:p14="http://schemas.microsoft.com/office/powerpoint/2010/main" val="1048964678"/>
+        <p14:creationId xmlns:p14="http://schemas.microsoft.com/office/powerpoint/2010/main" val="481133174"/>
       </p:ext>
     </p:extLst>
   </p:cSld>
@@ -3292,7 +3292,7 @@
           <p:cNvPr id="19" name="">
             <a:extLst xmlns:a="http://schemas.openxmlformats.org/drawingml/2006/main">
               <a:ext uri="{FF2B5EF4-FFF2-40B4-BE49-F238E27FC236}">
-                <a16:creationId xmlns:a16="http://schemas.microsoft.com/office/drawing/2014/main" id="{6BBE605C-D04F-46EC-A21B-CAEEBEF46CDC}"/>
+                <a16:creationId xmlns:a16="http://schemas.microsoft.com/office/drawing/2014/main" id="{F11F9A97-4CBF-4B2E-BAEE-A7BB16F305C2}"/>
               </a:ext>
             </a:extLst>
           </p:cNvPr>
@@ -3324,7 +3324,7 @@
           <p:cNvPr id="2" name="">
             <a:extLst xmlns:a="http://schemas.openxmlformats.org/drawingml/2006/main">
               <a:ext uri="{FF2B5EF4-FFF2-40B4-BE49-F238E27FC236}">
-                <a16:creationId xmlns:a16="http://schemas.microsoft.com/office/drawing/2014/main" id="{675729A1-F926-4DB5-9B0F-9C0F48AFE9AA}"/>
+                <a16:creationId xmlns:a16="http://schemas.microsoft.com/office/drawing/2014/main" id="{F5D6256B-78DC-4EE0-8E39-B431322AAB37}"/>
               </a:ext>
             </a:extLst>
           </p:cNvPr>
@@ -3381,7 +3381,7 @@
           <p:cNvPr id="3" name="">
             <a:extLst xmlns:a="http://schemas.openxmlformats.org/drawingml/2006/main">
               <a:ext uri="{FF2B5EF4-FFF2-40B4-BE49-F238E27FC236}">
-                <a16:creationId xmlns:a16="http://schemas.microsoft.com/office/drawing/2014/main" id="{FCAB147A-1A9F-4078-90CC-6928CB67459E}"/>
+                <a16:creationId xmlns:a16="http://schemas.microsoft.com/office/drawing/2014/main" id="{15E39DFA-D6BF-42C0-8EA0-BB08A9A941EB}"/>
               </a:ext>
             </a:extLst>
           </p:cNvPr>
@@ -3413,7 +3413,7 @@
           <p:cNvPr id="4" name="">
             <a:extLst xmlns:a="http://schemas.openxmlformats.org/drawingml/2006/main">
               <a:ext uri="{FF2B5EF4-FFF2-40B4-BE49-F238E27FC236}">
-                <a16:creationId xmlns:a16="http://schemas.microsoft.com/office/drawing/2014/main" id="{313BD202-FD04-4DE0-8B9E-62E242A4EB76}"/>
+                <a16:creationId xmlns:a16="http://schemas.microsoft.com/office/drawing/2014/main" id="{2D3B2285-B02E-497E-8F9E-7A4B9243F762}"/>
               </a:ext>
             </a:extLst>
           </p:cNvPr>
@@ -3470,7 +3470,7 @@
           <p:cNvPr id="5" name="">
             <a:extLst xmlns:a="http://schemas.openxmlformats.org/drawingml/2006/main">
               <a:ext uri="{FF2B5EF4-FFF2-40B4-BE49-F238E27FC236}">
-                <a16:creationId xmlns:a16="http://schemas.microsoft.com/office/drawing/2014/main" id="{E466EF2B-E9F8-4DB8-9533-9C38FF018A57}"/>
+                <a16:creationId xmlns:a16="http://schemas.microsoft.com/office/drawing/2014/main" id="{C2D7F1EE-F41D-4C5A-8169-D05B908D8ABF}"/>
               </a:ext>
             </a:extLst>
           </p:cNvPr>
@@ -3527,7 +3527,7 @@
           <p:cNvPr id="6" name="">
             <a:extLst xmlns:a="http://schemas.openxmlformats.org/drawingml/2006/main">
               <a:ext uri="{FF2B5EF4-FFF2-40B4-BE49-F238E27FC236}">
-                <a16:creationId xmlns:a16="http://schemas.microsoft.com/office/drawing/2014/main" id="{F69DA4D1-7F34-4A33-878D-17038AEA6774}"/>
+                <a16:creationId xmlns:a16="http://schemas.microsoft.com/office/drawing/2014/main" id="{6070EEA1-BABD-4624-860D-FCB62D75C753}"/>
               </a:ext>
             </a:extLst>
           </p:cNvPr>
@@ -3584,7 +3584,7 @@
           <p:cNvPr id="7" name="">
             <a:extLst xmlns:a="http://schemas.openxmlformats.org/drawingml/2006/main">
               <a:ext uri="{FF2B5EF4-FFF2-40B4-BE49-F238E27FC236}">
-                <a16:creationId xmlns:a16="http://schemas.microsoft.com/office/drawing/2014/main" id="{36832CA1-51BE-442F-AFE1-E215D610A366}"/>
+                <a16:creationId xmlns:a16="http://schemas.microsoft.com/office/drawing/2014/main" id="{5FE54F85-61D6-4491-80C8-24EA19F81806}"/>
               </a:ext>
             </a:extLst>
           </p:cNvPr>
@@ -3616,7 +3616,7 @@
           <p:cNvPr id="8" name="">
             <a:extLst xmlns:a="http://schemas.openxmlformats.org/drawingml/2006/main">
               <a:ext uri="{FF2B5EF4-FFF2-40B4-BE49-F238E27FC236}">
-                <a16:creationId xmlns:a16="http://schemas.microsoft.com/office/drawing/2014/main" id="{891BEB17-C657-4BFA-B721-49D03637C893}"/>
+                <a16:creationId xmlns:a16="http://schemas.microsoft.com/office/drawing/2014/main" id="{A2C4EAAD-419C-4CE3-9958-450694035D13}"/>
               </a:ext>
             </a:extLst>
           </p:cNvPr>
@@ -3673,7 +3673,7 @@
           <p:cNvPr id="9" name="">
             <a:extLst xmlns:a="http://schemas.openxmlformats.org/drawingml/2006/main">
               <a:ext uri="{FF2B5EF4-FFF2-40B4-BE49-F238E27FC236}">
-                <a16:creationId xmlns:a16="http://schemas.microsoft.com/office/drawing/2014/main" id="{C2710B1A-7851-444D-A11D-E9EDD1A6494A}"/>
+                <a16:creationId xmlns:a16="http://schemas.microsoft.com/office/drawing/2014/main" id="{128BD3FB-A337-4C67-B891-368B88ABD27F}"/>
               </a:ext>
             </a:extLst>
           </p:cNvPr>
@@ -3730,7 +3730,7 @@
           <p:cNvPr id="10" name="">
             <a:extLst xmlns:a="http://schemas.openxmlformats.org/drawingml/2006/main">
               <a:ext uri="{FF2B5EF4-FFF2-40B4-BE49-F238E27FC236}">
-                <a16:creationId xmlns:a16="http://schemas.microsoft.com/office/drawing/2014/main" id="{E0ED78B4-173B-406E-AFD3-44E517042EA1}"/>
+                <a16:creationId xmlns:a16="http://schemas.microsoft.com/office/drawing/2014/main" id="{E0A4EF02-099E-4451-B633-6F7B5895815F}"/>
               </a:ext>
             </a:extLst>
           </p:cNvPr>
@@ -3787,7 +3787,7 @@
           <p:cNvPr id="11" name="">
             <a:extLst xmlns:a="http://schemas.openxmlformats.org/drawingml/2006/main">
               <a:ext uri="{FF2B5EF4-FFF2-40B4-BE49-F238E27FC236}">
-                <a16:creationId xmlns:a16="http://schemas.microsoft.com/office/drawing/2014/main" id="{52E319C4-D57E-4F23-9B46-3ED9D45C9545}"/>
+                <a16:creationId xmlns:a16="http://schemas.microsoft.com/office/drawing/2014/main" id="{F860CE04-830F-45F3-ABE6-DE96E5B01CE2}"/>
               </a:ext>
             </a:extLst>
           </p:cNvPr>
@@ -3821,7 +3821,7 @@
           <p:cNvPr id="12" name="">
             <a:extLst xmlns:a="http://schemas.openxmlformats.org/drawingml/2006/main">
               <a:ext uri="{FF2B5EF4-FFF2-40B4-BE49-F238E27FC236}">
-                <a16:creationId xmlns:a16="http://schemas.microsoft.com/office/drawing/2014/main" id="{026B3967-1A52-4534-AE21-F08C87C6E757}"/>
+                <a16:creationId xmlns:a16="http://schemas.microsoft.com/office/drawing/2014/main" id="{26CFC677-DB15-47BF-94A9-ED6742915D41}"/>
               </a:ext>
             </a:extLst>
           </p:cNvPr>
@@ -3878,7 +3878,7 @@
           <p:cNvPr id="13" name="">
             <a:extLst xmlns:a="http://schemas.openxmlformats.org/drawingml/2006/main">
               <a:ext uri="{FF2B5EF4-FFF2-40B4-BE49-F238E27FC236}">
-                <a16:creationId xmlns:a16="http://schemas.microsoft.com/office/drawing/2014/main" id="{713AC859-497B-428F-B426-42CD5B9C9E2B}"/>
+                <a16:creationId xmlns:a16="http://schemas.microsoft.com/office/drawing/2014/main" id="{B853A086-0F8C-44AD-9D27-FBA34A8EA6EF}"/>
               </a:ext>
             </a:extLst>
           </p:cNvPr>
@@ -3935,7 +3935,7 @@
           <p:cNvPr id="14" name="">
             <a:extLst xmlns:a="http://schemas.openxmlformats.org/drawingml/2006/main">
               <a:ext uri="{FF2B5EF4-FFF2-40B4-BE49-F238E27FC236}">
-                <a16:creationId xmlns:a16="http://schemas.microsoft.com/office/drawing/2014/main" id="{045646FD-7EF2-4573-BB55-505719D61A0D}"/>
+                <a16:creationId xmlns:a16="http://schemas.microsoft.com/office/drawing/2014/main" id="{1CD6E0FC-AB97-4F46-BB0F-C6B3E378CAEE}"/>
               </a:ext>
             </a:extLst>
           </p:cNvPr>
@@ -3992,7 +3992,7 @@
           <p:cNvPr id="15" name="">
             <a:extLst xmlns:a="http://schemas.openxmlformats.org/drawingml/2006/main">
               <a:ext uri="{FF2B5EF4-FFF2-40B4-BE49-F238E27FC236}">
-                <a16:creationId xmlns:a16="http://schemas.microsoft.com/office/drawing/2014/main" id="{3B813189-5170-4CA0-9CFA-F38CBBC81902}"/>
+                <a16:creationId xmlns:a16="http://schemas.microsoft.com/office/drawing/2014/main" id="{26665499-915B-45CA-A3DD-C7C0D9D600DC}"/>
               </a:ext>
             </a:extLst>
           </p:cNvPr>
@@ -4026,7 +4026,7 @@
           <p:cNvPr id="16" name="">
             <a:extLst xmlns:a="http://schemas.openxmlformats.org/drawingml/2006/main">
               <a:ext uri="{FF2B5EF4-FFF2-40B4-BE49-F238E27FC236}">
-                <a16:creationId xmlns:a16="http://schemas.microsoft.com/office/drawing/2014/main" id="{9A073156-A2F6-4388-9EFC-59F6E70A09F0}"/>
+                <a16:creationId xmlns:a16="http://schemas.microsoft.com/office/drawing/2014/main" id="{E0B6518D-BE2A-4B69-AB12-D0D6BCBA8AD0}"/>
               </a:ext>
             </a:extLst>
           </p:cNvPr>
@@ -4083,7 +4083,7 @@
           <p:cNvPr id="17" name="">
             <a:extLst xmlns:a="http://schemas.openxmlformats.org/drawingml/2006/main">
               <a:ext uri="{FF2B5EF4-FFF2-40B4-BE49-F238E27FC236}">
-                <a16:creationId xmlns:a16="http://schemas.microsoft.com/office/drawing/2014/main" id="{72783E8D-5949-4559-BB17-4E717498AD0F}"/>
+                <a16:creationId xmlns:a16="http://schemas.microsoft.com/office/drawing/2014/main" id="{31668331-8581-44B8-83CC-DFD812B53A9F}"/>
               </a:ext>
             </a:extLst>
           </p:cNvPr>
@@ -4140,7 +4140,7 @@
           <p:cNvPr id="18" name="">
             <a:extLst xmlns:a="http://schemas.openxmlformats.org/drawingml/2006/main">
               <a:ext uri="{FF2B5EF4-FFF2-40B4-BE49-F238E27FC236}">
-                <a16:creationId xmlns:a16="http://schemas.microsoft.com/office/drawing/2014/main" id="{B9F0E4C5-C7D4-4886-A668-299CDA56090D}"/>
+                <a16:creationId xmlns:a16="http://schemas.microsoft.com/office/drawing/2014/main" id="{C8D39B15-82DC-46F4-AD33-ED6BA61DF497}"/>
               </a:ext>
             </a:extLst>
           </p:cNvPr>
@@ -4195,7 +4195,7 @@
     </p:spTree>
     <p:extLst>
       <p:ext uri="{BB962C8B-B14F-4D97-AF65-F5344CB8AC3E}">
-        <p14:creationId xmlns:p14="http://schemas.microsoft.com/office/powerpoint/2010/main" val="1142974411"/>
+        <p14:creationId xmlns:p14="http://schemas.microsoft.com/office/powerpoint/2010/main" val="1605436999"/>
       </p:ext>
     </p:extLst>
   </p:cSld>
@@ -4350,7 +4350,7 @@
           <p:cNvPr id="23" name="">
             <a:extLst xmlns:a="http://schemas.openxmlformats.org/drawingml/2006/main">
               <a:ext uri="{FF2B5EF4-FFF2-40B4-BE49-F238E27FC236}">
-                <a16:creationId xmlns:a16="http://schemas.microsoft.com/office/drawing/2014/main" id="{D8CA4538-E3AF-4720-AC4B-E8CA7449CD64}"/>
+                <a16:creationId xmlns:a16="http://schemas.microsoft.com/office/drawing/2014/main" id="{20D33C1A-28F9-4076-8A5B-CBF3ED3ED7BD}"/>
               </a:ext>
             </a:extLst>
           </p:cNvPr>
@@ -4382,7 +4382,7 @@
           <p:cNvPr id="2" name="">
             <a:extLst xmlns:a="http://schemas.openxmlformats.org/drawingml/2006/main">
               <a:ext uri="{FF2B5EF4-FFF2-40B4-BE49-F238E27FC236}">
-                <a16:creationId xmlns:a16="http://schemas.microsoft.com/office/drawing/2014/main" id="{57EB587A-772B-41D0-9523-C546300A6D0E}"/>
+                <a16:creationId xmlns:a16="http://schemas.microsoft.com/office/drawing/2014/main" id="{5E8E2DB9-1695-4A30-B0C4-8553AA6C1334}"/>
               </a:ext>
             </a:extLst>
           </p:cNvPr>
@@ -4439,7 +4439,7 @@
           <p:cNvPr id="3" name="">
             <a:extLst xmlns:a="http://schemas.openxmlformats.org/drawingml/2006/main">
               <a:ext uri="{FF2B5EF4-FFF2-40B4-BE49-F238E27FC236}">
-                <a16:creationId xmlns:a16="http://schemas.microsoft.com/office/drawing/2014/main" id="{4B6CBBA4-160F-4FF0-A78D-50ADD2979E54}"/>
+                <a16:creationId xmlns:a16="http://schemas.microsoft.com/office/drawing/2014/main" id="{F37C946D-5E04-4775-87F5-647DBF81CBC4}"/>
               </a:ext>
             </a:extLst>
           </p:cNvPr>
@@ -4471,7 +4471,7 @@
           <p:cNvPr id="4" name="">
             <a:extLst xmlns:a="http://schemas.openxmlformats.org/drawingml/2006/main">
               <a:ext uri="{FF2B5EF4-FFF2-40B4-BE49-F238E27FC236}">
-                <a16:creationId xmlns:a16="http://schemas.microsoft.com/office/drawing/2014/main" id="{4A0C4194-7123-4B23-8E68-E5A585EB4A96}"/>
+                <a16:creationId xmlns:a16="http://schemas.microsoft.com/office/drawing/2014/main" id="{DA057036-B4A6-4032-9E01-199B6F6B3EF2}"/>
               </a:ext>
             </a:extLst>
           </p:cNvPr>
@@ -4528,7 +4528,7 @@
           <p:cNvPr id="5" name="">
             <a:extLst xmlns:a="http://schemas.openxmlformats.org/drawingml/2006/main">
               <a:ext uri="{FF2B5EF4-FFF2-40B4-BE49-F238E27FC236}">
-                <a16:creationId xmlns:a16="http://schemas.microsoft.com/office/drawing/2014/main" id="{9FF40AF6-F5C4-4D1F-958C-3D0349FD4E2B}"/>
+                <a16:creationId xmlns:a16="http://schemas.microsoft.com/office/drawing/2014/main" id="{D925C3E4-A881-4B4D-A83D-EACF09F5CD20}"/>
               </a:ext>
             </a:extLst>
           </p:cNvPr>
@@ -4585,7 +4585,7 @@
           <p:cNvPr id="6" name="">
             <a:extLst xmlns:a="http://schemas.openxmlformats.org/drawingml/2006/main">
               <a:ext uri="{FF2B5EF4-FFF2-40B4-BE49-F238E27FC236}">
-                <a16:creationId xmlns:a16="http://schemas.microsoft.com/office/drawing/2014/main" id="{8BCAF19C-F593-45E1-801F-92BA8BFD04D6}"/>
+                <a16:creationId xmlns:a16="http://schemas.microsoft.com/office/drawing/2014/main" id="{891E99BB-DB6B-463E-A629-FB8BB20EA920}"/>
               </a:ext>
             </a:extLst>
           </p:cNvPr>
@@ -4642,7 +4642,7 @@
           <p:cNvPr id="7" name="">
             <a:extLst xmlns:a="http://schemas.openxmlformats.org/drawingml/2006/main">
               <a:ext uri="{FF2B5EF4-FFF2-40B4-BE49-F238E27FC236}">
-                <a16:creationId xmlns:a16="http://schemas.microsoft.com/office/drawing/2014/main" id="{3897350B-D9AF-4042-AD59-B710BC3575A8}"/>
+                <a16:creationId xmlns:a16="http://schemas.microsoft.com/office/drawing/2014/main" id="{921A9B73-02F8-47CB-8F59-C5100C48D1F3}"/>
               </a:ext>
             </a:extLst>
           </p:cNvPr>
@@ -4674,7 +4674,7 @@
           <p:cNvPr id="8" name="">
             <a:extLst xmlns:a="http://schemas.openxmlformats.org/drawingml/2006/main">
               <a:ext uri="{FF2B5EF4-FFF2-40B4-BE49-F238E27FC236}">
-                <a16:creationId xmlns:a16="http://schemas.microsoft.com/office/drawing/2014/main" id="{A4334191-F1EF-4A92-AB38-E975ACAF9D14}"/>
+                <a16:creationId xmlns:a16="http://schemas.microsoft.com/office/drawing/2014/main" id="{A8B08132-0693-4AA6-9B63-1AD29B0C50B7}"/>
               </a:ext>
             </a:extLst>
           </p:cNvPr>
@@ -4731,7 +4731,7 @@
           <p:cNvPr id="9" name="">
             <a:extLst xmlns:a="http://schemas.openxmlformats.org/drawingml/2006/main">
               <a:ext uri="{FF2B5EF4-FFF2-40B4-BE49-F238E27FC236}">
-                <a16:creationId xmlns:a16="http://schemas.microsoft.com/office/drawing/2014/main" id="{4A96D50C-C308-4A93-A18A-A2E54E89B6ED}"/>
+                <a16:creationId xmlns:a16="http://schemas.microsoft.com/office/drawing/2014/main" id="{B5DACBBC-EDDB-427D-A9D7-A46DE783C519}"/>
               </a:ext>
             </a:extLst>
           </p:cNvPr>
@@ -4788,7 +4788,7 @@
           <p:cNvPr id="10" name="">
             <a:extLst xmlns:a="http://schemas.openxmlformats.org/drawingml/2006/main">
               <a:ext uri="{FF2B5EF4-FFF2-40B4-BE49-F238E27FC236}">
-                <a16:creationId xmlns:a16="http://schemas.microsoft.com/office/drawing/2014/main" id="{9066D795-043A-49DB-8F31-D7FE53B10B1C}"/>
+                <a16:creationId xmlns:a16="http://schemas.microsoft.com/office/drawing/2014/main" id="{A6751538-641F-4779-99A7-85E835004270}"/>
               </a:ext>
             </a:extLst>
           </p:cNvPr>
@@ -4822,7 +4822,7 @@
           <p:cNvPr id="11" name="">
             <a:extLst xmlns:a="http://schemas.openxmlformats.org/drawingml/2006/main">
               <a:ext uri="{FF2B5EF4-FFF2-40B4-BE49-F238E27FC236}">
-                <a16:creationId xmlns:a16="http://schemas.microsoft.com/office/drawing/2014/main" id="{34745516-6FE7-4E63-A1AE-36D304C6D684}"/>
+                <a16:creationId xmlns:a16="http://schemas.microsoft.com/office/drawing/2014/main" id="{F25AD91A-F765-4452-BF79-CD54B4E72AB1}"/>
               </a:ext>
             </a:extLst>
           </p:cNvPr>
@@ -4854,7 +4854,7 @@
           <p:cNvPr id="12" name="">
             <a:extLst xmlns:a="http://schemas.openxmlformats.org/drawingml/2006/main">
               <a:ext uri="{FF2B5EF4-FFF2-40B4-BE49-F238E27FC236}">
-                <a16:creationId xmlns:a16="http://schemas.microsoft.com/office/drawing/2014/main" id="{D66A8878-7DA0-4366-BD66-2352AEFA71B3}"/>
+                <a16:creationId xmlns:a16="http://schemas.microsoft.com/office/drawing/2014/main" id="{09FD2FDA-207E-4A13-A00C-5F8AA0F7916F}"/>
               </a:ext>
             </a:extLst>
           </p:cNvPr>
@@ -4911,7 +4911,7 @@
           <p:cNvPr id="13" name="">
             <a:extLst xmlns:a="http://schemas.openxmlformats.org/drawingml/2006/main">
               <a:ext uri="{FF2B5EF4-FFF2-40B4-BE49-F238E27FC236}">
-                <a16:creationId xmlns:a16="http://schemas.microsoft.com/office/drawing/2014/main" id="{4F86961B-CAFE-4803-BC8A-B2D8D0A61A37}"/>
+                <a16:creationId xmlns:a16="http://schemas.microsoft.com/office/drawing/2014/main" id="{635364CE-CA81-412B-AD63-BA13549363FA}"/>
               </a:ext>
             </a:extLst>
           </p:cNvPr>
@@ -4968,7 +4968,7 @@
           <p:cNvPr id="14" name="">
             <a:extLst xmlns:a="http://schemas.openxmlformats.org/drawingml/2006/main">
               <a:ext uri="{FF2B5EF4-FFF2-40B4-BE49-F238E27FC236}">
-                <a16:creationId xmlns:a16="http://schemas.microsoft.com/office/drawing/2014/main" id="{D899F31A-57F5-4D8A-9D72-97F5076DE457}"/>
+                <a16:creationId xmlns:a16="http://schemas.microsoft.com/office/drawing/2014/main" id="{4189CD8B-D3FB-4D15-B867-D6CDF2318004}"/>
               </a:ext>
             </a:extLst>
           </p:cNvPr>
@@ -5002,7 +5002,7 @@
           <p:cNvPr id="15" name="">
             <a:extLst xmlns:a="http://schemas.openxmlformats.org/drawingml/2006/main">
               <a:ext uri="{FF2B5EF4-FFF2-40B4-BE49-F238E27FC236}">
-                <a16:creationId xmlns:a16="http://schemas.microsoft.com/office/drawing/2014/main" id="{90C7F88D-163F-4F1C-86F9-28733A53E850}"/>
+                <a16:creationId xmlns:a16="http://schemas.microsoft.com/office/drawing/2014/main" id="{EDC91A7D-DA8A-4C9B-99C6-12872012DD5D}"/>
               </a:ext>
             </a:extLst>
           </p:cNvPr>
@@ -5034,7 +5034,7 @@
           <p:cNvPr id="16" name="">
             <a:extLst xmlns:a="http://schemas.openxmlformats.org/drawingml/2006/main">
               <a:ext uri="{FF2B5EF4-FFF2-40B4-BE49-F238E27FC236}">
-                <a16:creationId xmlns:a16="http://schemas.microsoft.com/office/drawing/2014/main" id="{F1043910-FDB0-4A0B-8AF4-F08E1F4C28AF}"/>
+                <a16:creationId xmlns:a16="http://schemas.microsoft.com/office/drawing/2014/main" id="{7512991B-A80B-405C-8B0C-654425E0AFE3}"/>
               </a:ext>
             </a:extLst>
           </p:cNvPr>
@@ -5091,7 +5091,7 @@
           <p:cNvPr id="17" name="">
             <a:extLst xmlns:a="http://schemas.openxmlformats.org/drawingml/2006/main">
               <a:ext uri="{FF2B5EF4-FFF2-40B4-BE49-F238E27FC236}">
-                <a16:creationId xmlns:a16="http://schemas.microsoft.com/office/drawing/2014/main" id="{B5D0B3C4-04F9-4F2F-8536-BBCC97B32654}"/>
+                <a16:creationId xmlns:a16="http://schemas.microsoft.com/office/drawing/2014/main" id="{14F7B739-1A40-400C-9C63-9A055F2167F6}"/>
               </a:ext>
             </a:extLst>
           </p:cNvPr>
@@ -5148,7 +5148,7 @@
           <p:cNvPr id="18" name="">
             <a:extLst xmlns:a="http://schemas.openxmlformats.org/drawingml/2006/main">
               <a:ext uri="{FF2B5EF4-FFF2-40B4-BE49-F238E27FC236}">
-                <a16:creationId xmlns:a16="http://schemas.microsoft.com/office/drawing/2014/main" id="{1033125B-1727-42F3-8CF1-508807C73520}"/>
+                <a16:creationId xmlns:a16="http://schemas.microsoft.com/office/drawing/2014/main" id="{6CB7B43C-6960-433F-AC7F-E187BC1540BF}"/>
               </a:ext>
             </a:extLst>
           </p:cNvPr>
@@ -5182,7 +5182,7 @@
           <p:cNvPr id="19" name="">
             <a:extLst xmlns:a="http://schemas.openxmlformats.org/drawingml/2006/main">
               <a:ext uri="{FF2B5EF4-FFF2-40B4-BE49-F238E27FC236}">
-                <a16:creationId xmlns:a16="http://schemas.microsoft.com/office/drawing/2014/main" id="{DE7DF18B-AEEF-4492-A7EA-CA4524BC5DF4}"/>
+                <a16:creationId xmlns:a16="http://schemas.microsoft.com/office/drawing/2014/main" id="{9A212052-2C37-41DC-AD2B-CF7CEE84BBDC}"/>
               </a:ext>
             </a:extLst>
           </p:cNvPr>
@@ -5214,7 +5214,7 @@
           <p:cNvPr id="20" name="">
             <a:extLst xmlns:a="http://schemas.openxmlformats.org/drawingml/2006/main">
               <a:ext uri="{FF2B5EF4-FFF2-40B4-BE49-F238E27FC236}">
-                <a16:creationId xmlns:a16="http://schemas.microsoft.com/office/drawing/2014/main" id="{5E1EEB22-85AB-46E6-A47B-960374B4C67B}"/>
+                <a16:creationId xmlns:a16="http://schemas.microsoft.com/office/drawing/2014/main" id="{54B4CB8C-7117-4AD0-AAE5-F461DC227C7C}"/>
               </a:ext>
             </a:extLst>
           </p:cNvPr>
@@ -5271,7 +5271,7 @@
           <p:cNvPr id="21" name="">
             <a:extLst xmlns:a="http://schemas.openxmlformats.org/drawingml/2006/main">
               <a:ext uri="{FF2B5EF4-FFF2-40B4-BE49-F238E27FC236}">
-                <a16:creationId xmlns:a16="http://schemas.microsoft.com/office/drawing/2014/main" id="{BAE3F914-A78E-481A-A4B3-200403535D9B}"/>
+                <a16:creationId xmlns:a16="http://schemas.microsoft.com/office/drawing/2014/main" id="{2DE76054-87BA-45D9-B9B4-8525A388F856}"/>
               </a:ext>
             </a:extLst>
           </p:cNvPr>
@@ -5328,7 +5328,7 @@
           <p:cNvPr id="22" name="">
             <a:extLst xmlns:a="http://schemas.openxmlformats.org/drawingml/2006/main">
               <a:ext uri="{FF2B5EF4-FFF2-40B4-BE49-F238E27FC236}">
-                <a16:creationId xmlns:a16="http://schemas.microsoft.com/office/drawing/2014/main" id="{84FE5145-01E1-41C3-B7C0-638DAE9DAB76}"/>
+                <a16:creationId xmlns:a16="http://schemas.microsoft.com/office/drawing/2014/main" id="{804F2A27-E8EB-41C0-AE07-27D6E0202C2F}"/>
               </a:ext>
             </a:extLst>
           </p:cNvPr>
@@ -5383,7 +5383,7 @@
     </p:spTree>
     <p:extLst>
       <p:ext uri="{BB962C8B-B14F-4D97-AF65-F5344CB8AC3E}">
-        <p14:creationId xmlns:p14="http://schemas.microsoft.com/office/powerpoint/2010/main" val="2010370329"/>
+        <p14:creationId xmlns:p14="http://schemas.microsoft.com/office/powerpoint/2010/main" val="946188278"/>
       </p:ext>
     </p:extLst>
   </p:cSld>
@@ -5584,7 +5584,7 @@
           <p:cNvPr id="23" name="">
             <a:extLst xmlns:a="http://schemas.openxmlformats.org/drawingml/2006/main">
               <a:ext uri="{FF2B5EF4-FFF2-40B4-BE49-F238E27FC236}">
-                <a16:creationId xmlns:a16="http://schemas.microsoft.com/office/drawing/2014/main" id="{3F0238E9-656F-43E7-ADDA-2DEB3F8FD949}"/>
+                <a16:creationId xmlns:a16="http://schemas.microsoft.com/office/drawing/2014/main" id="{9DF3060F-D28A-4911-9E2B-498F9E3D611E}"/>
               </a:ext>
             </a:extLst>
           </p:cNvPr>
@@ -5616,7 +5616,7 @@
           <p:cNvPr id="2" name="">
             <a:extLst xmlns:a="http://schemas.openxmlformats.org/drawingml/2006/main">
               <a:ext uri="{FF2B5EF4-FFF2-40B4-BE49-F238E27FC236}">
-                <a16:creationId xmlns:a16="http://schemas.microsoft.com/office/drawing/2014/main" id="{889645BF-E042-46D0-9DAB-626CC00BC6DD}"/>
+                <a16:creationId xmlns:a16="http://schemas.microsoft.com/office/drawing/2014/main" id="{B7AA0AB0-6C84-49B6-94A9-C0EF6BF1C3F2}"/>
               </a:ext>
             </a:extLst>
           </p:cNvPr>
@@ -5673,7 +5673,7 @@
           <p:cNvPr id="3" name="">
             <a:extLst xmlns:a="http://schemas.openxmlformats.org/drawingml/2006/main">
               <a:ext uri="{FF2B5EF4-FFF2-40B4-BE49-F238E27FC236}">
-                <a16:creationId xmlns:a16="http://schemas.microsoft.com/office/drawing/2014/main" id="{13E18C2F-93B1-48CA-8198-3EDC36AEAD95}"/>
+                <a16:creationId xmlns:a16="http://schemas.microsoft.com/office/drawing/2014/main" id="{682BF0A7-B8E8-4E63-8F7B-858A055665C0}"/>
               </a:ext>
             </a:extLst>
           </p:cNvPr>
@@ -5705,7 +5705,7 @@
           <p:cNvPr id="4" name="">
             <a:extLst xmlns:a="http://schemas.openxmlformats.org/drawingml/2006/main">
               <a:ext uri="{FF2B5EF4-FFF2-40B4-BE49-F238E27FC236}">
-                <a16:creationId xmlns:a16="http://schemas.microsoft.com/office/drawing/2014/main" id="{A287B8B4-B43F-4530-9D35-67C6121A3B34}"/>
+                <a16:creationId xmlns:a16="http://schemas.microsoft.com/office/drawing/2014/main" id="{158046C4-F416-4FB1-B6A3-9417F9D5141B}"/>
               </a:ext>
             </a:extLst>
           </p:cNvPr>
@@ -5762,7 +5762,7 @@
           <p:cNvPr id="5" name="">
             <a:extLst xmlns:a="http://schemas.openxmlformats.org/drawingml/2006/main">
               <a:ext uri="{FF2B5EF4-FFF2-40B4-BE49-F238E27FC236}">
-                <a16:creationId xmlns:a16="http://schemas.microsoft.com/office/drawing/2014/main" id="{B901CB9C-ACAD-4925-9BC9-20B42E9FF895}"/>
+                <a16:creationId xmlns:a16="http://schemas.microsoft.com/office/drawing/2014/main" id="{52DA2625-5CA1-45ED-B168-B708A4340EC7}"/>
               </a:ext>
             </a:extLst>
           </p:cNvPr>
@@ -5819,7 +5819,7 @@
           <p:cNvPr id="6" name="">
             <a:extLst xmlns:a="http://schemas.openxmlformats.org/drawingml/2006/main">
               <a:ext uri="{FF2B5EF4-FFF2-40B4-BE49-F238E27FC236}">
-                <a16:creationId xmlns:a16="http://schemas.microsoft.com/office/drawing/2014/main" id="{ADE1659E-10FA-416B-AD75-6F0BEEFD8911}"/>
+                <a16:creationId xmlns:a16="http://schemas.microsoft.com/office/drawing/2014/main" id="{1817BE43-9356-4E99-817F-B7A29421C5F6}"/>
               </a:ext>
             </a:extLst>
           </p:cNvPr>
@@ -5876,7 +5876,7 @@
           <p:cNvPr id="7" name="">
             <a:extLst xmlns:a="http://schemas.openxmlformats.org/drawingml/2006/main">
               <a:ext uri="{FF2B5EF4-FFF2-40B4-BE49-F238E27FC236}">
-                <a16:creationId xmlns:a16="http://schemas.microsoft.com/office/drawing/2014/main" id="{DE9D5D43-B9EA-4B02-A712-63A871B8A84C}"/>
+                <a16:creationId xmlns:a16="http://schemas.microsoft.com/office/drawing/2014/main" id="{A0A07203-0D72-4716-8EF7-46B3C7ED231D}"/>
               </a:ext>
             </a:extLst>
           </p:cNvPr>
@@ -5908,7 +5908,7 @@
           <p:cNvPr id="8" name="">
             <a:extLst xmlns:a="http://schemas.openxmlformats.org/drawingml/2006/main">
               <a:ext uri="{FF2B5EF4-FFF2-40B4-BE49-F238E27FC236}">
-                <a16:creationId xmlns:a16="http://schemas.microsoft.com/office/drawing/2014/main" id="{147DF04A-7AC5-4E85-9989-35EF68C382FE}"/>
+                <a16:creationId xmlns:a16="http://schemas.microsoft.com/office/drawing/2014/main" id="{6ACC6CF6-72F5-4BFA-9443-5690887CB011}"/>
               </a:ext>
             </a:extLst>
           </p:cNvPr>
@@ -5965,7 +5965,7 @@
           <p:cNvPr id="9" name="">
             <a:extLst xmlns:a="http://schemas.openxmlformats.org/drawingml/2006/main">
               <a:ext uri="{FF2B5EF4-FFF2-40B4-BE49-F238E27FC236}">
-                <a16:creationId xmlns:a16="http://schemas.microsoft.com/office/drawing/2014/main" id="{FCB87445-6B0D-494A-8F9D-6DA4C8A82B5A}"/>
+                <a16:creationId xmlns:a16="http://schemas.microsoft.com/office/drawing/2014/main" id="{F890978F-045A-4031-912D-0BEEBADF30E1}"/>
               </a:ext>
             </a:extLst>
           </p:cNvPr>
@@ -6022,7 +6022,7 @@
           <p:cNvPr id="10" name="">
             <a:extLst xmlns:a="http://schemas.openxmlformats.org/drawingml/2006/main">
               <a:ext uri="{FF2B5EF4-FFF2-40B4-BE49-F238E27FC236}">
-                <a16:creationId xmlns:a16="http://schemas.microsoft.com/office/drawing/2014/main" id="{5EA52FCB-3416-4BF6-B35D-F4C69E2240B8}"/>
+                <a16:creationId xmlns:a16="http://schemas.microsoft.com/office/drawing/2014/main" id="{E7F38997-9B5A-49DE-AF7B-9E6CA02D34B3}"/>
               </a:ext>
             </a:extLst>
           </p:cNvPr>
@@ -6056,7 +6056,7 @@
           <p:cNvPr id="11" name="">
             <a:extLst xmlns:a="http://schemas.openxmlformats.org/drawingml/2006/main">
               <a:ext uri="{FF2B5EF4-FFF2-40B4-BE49-F238E27FC236}">
-                <a16:creationId xmlns:a16="http://schemas.microsoft.com/office/drawing/2014/main" id="{4DA6FC61-7B12-47FA-873B-6113A3EE74D5}"/>
+                <a16:creationId xmlns:a16="http://schemas.microsoft.com/office/drawing/2014/main" id="{63D3BB17-06D4-4A89-AD0A-F752A2DA1693}"/>
               </a:ext>
             </a:extLst>
           </p:cNvPr>
@@ -6088,7 +6088,7 @@
           <p:cNvPr id="12" name="">
             <a:extLst xmlns:a="http://schemas.openxmlformats.org/drawingml/2006/main">
               <a:ext uri="{FF2B5EF4-FFF2-40B4-BE49-F238E27FC236}">
-                <a16:creationId xmlns:a16="http://schemas.microsoft.com/office/drawing/2014/main" id="{5EFA812A-E111-4825-BEE4-33DD66282BBF}"/>
+                <a16:creationId xmlns:a16="http://schemas.microsoft.com/office/drawing/2014/main" id="{DDC41FA0-AD9E-444B-8C32-2CAE704A05C0}"/>
               </a:ext>
             </a:extLst>
           </p:cNvPr>
@@ -6145,7 +6145,7 @@
           <p:cNvPr id="13" name="">
             <a:extLst xmlns:a="http://schemas.openxmlformats.org/drawingml/2006/main">
               <a:ext uri="{FF2B5EF4-FFF2-40B4-BE49-F238E27FC236}">
-                <a16:creationId xmlns:a16="http://schemas.microsoft.com/office/drawing/2014/main" id="{0455EDF8-D318-4B33-8927-71ABE42A1977}"/>
+                <a16:creationId xmlns:a16="http://schemas.microsoft.com/office/drawing/2014/main" id="{7AAB8F1B-9604-4138-86FB-706EDFB143CB}"/>
               </a:ext>
             </a:extLst>
           </p:cNvPr>
@@ -6202,7 +6202,7 @@
           <p:cNvPr id="14" name="">
             <a:extLst xmlns:a="http://schemas.openxmlformats.org/drawingml/2006/main">
               <a:ext uri="{FF2B5EF4-FFF2-40B4-BE49-F238E27FC236}">
-                <a16:creationId xmlns:a16="http://schemas.microsoft.com/office/drawing/2014/main" id="{DB7180B6-8804-447A-995A-9DBE87E21008}"/>
+                <a16:creationId xmlns:a16="http://schemas.microsoft.com/office/drawing/2014/main" id="{5D79C741-784E-4CDA-988E-6FD2E3416CF9}"/>
               </a:ext>
             </a:extLst>
           </p:cNvPr>
@@ -6236,7 +6236,7 @@
           <p:cNvPr id="15" name="">
             <a:extLst xmlns:a="http://schemas.openxmlformats.org/drawingml/2006/main">
               <a:ext uri="{FF2B5EF4-FFF2-40B4-BE49-F238E27FC236}">
-                <a16:creationId xmlns:a16="http://schemas.microsoft.com/office/drawing/2014/main" id="{06794CE1-BE3D-41BB-B521-452A8BE775B5}"/>
+                <a16:creationId xmlns:a16="http://schemas.microsoft.com/office/drawing/2014/main" id="{CF09A93F-33B5-4B56-B444-84B453EF3688}"/>
               </a:ext>
             </a:extLst>
           </p:cNvPr>
@@ -6268,7 +6268,7 @@
           <p:cNvPr id="16" name="">
             <a:extLst xmlns:a="http://schemas.openxmlformats.org/drawingml/2006/main">
               <a:ext uri="{FF2B5EF4-FFF2-40B4-BE49-F238E27FC236}">
-                <a16:creationId xmlns:a16="http://schemas.microsoft.com/office/drawing/2014/main" id="{FB8FCCC3-2477-4428-886F-AF53C93176E6}"/>
+                <a16:creationId xmlns:a16="http://schemas.microsoft.com/office/drawing/2014/main" id="{14E6CC55-6D24-4F56-9B8D-6B009609494B}"/>
               </a:ext>
             </a:extLst>
           </p:cNvPr>
@@ -6325,7 +6325,7 @@
           <p:cNvPr id="17" name="">
             <a:extLst xmlns:a="http://schemas.openxmlformats.org/drawingml/2006/main">
               <a:ext uri="{FF2B5EF4-FFF2-40B4-BE49-F238E27FC236}">
-                <a16:creationId xmlns:a16="http://schemas.microsoft.com/office/drawing/2014/main" id="{74FE828D-4C69-4130-860F-B57D72C06C99}"/>
+                <a16:creationId xmlns:a16="http://schemas.microsoft.com/office/drawing/2014/main" id="{B54DA7E3-88ED-41E5-B34B-22C32CBE7E92}"/>
               </a:ext>
             </a:extLst>
           </p:cNvPr>
@@ -6382,7 +6382,7 @@
           <p:cNvPr id="18" name="">
             <a:extLst xmlns:a="http://schemas.openxmlformats.org/drawingml/2006/main">
               <a:ext uri="{FF2B5EF4-FFF2-40B4-BE49-F238E27FC236}">
-                <a16:creationId xmlns:a16="http://schemas.microsoft.com/office/drawing/2014/main" id="{36E3D874-35D8-45A1-9689-0BBD7B60A1E5}"/>
+                <a16:creationId xmlns:a16="http://schemas.microsoft.com/office/drawing/2014/main" id="{B3A465AD-41D4-43AF-9274-3A4461CC174F}"/>
               </a:ext>
             </a:extLst>
           </p:cNvPr>
@@ -6416,7 +6416,7 @@
           <p:cNvPr id="19" name="">
             <a:extLst xmlns:a="http://schemas.openxmlformats.org/drawingml/2006/main">
               <a:ext uri="{FF2B5EF4-FFF2-40B4-BE49-F238E27FC236}">
-                <a16:creationId xmlns:a16="http://schemas.microsoft.com/office/drawing/2014/main" id="{89E0D819-3C45-4624-84EA-921AA07B98C5}"/>
+                <a16:creationId xmlns:a16="http://schemas.microsoft.com/office/drawing/2014/main" id="{E4684021-33C9-44E2-B45B-4BA618079C6F}"/>
               </a:ext>
             </a:extLst>
           </p:cNvPr>
@@ -6448,7 +6448,7 @@
           <p:cNvPr id="20" name="">
             <a:extLst xmlns:a="http://schemas.openxmlformats.org/drawingml/2006/main">
               <a:ext uri="{FF2B5EF4-FFF2-40B4-BE49-F238E27FC236}">
-                <a16:creationId xmlns:a16="http://schemas.microsoft.com/office/drawing/2014/main" id="{C9E4CAD5-891E-4D76-A880-05DB73FAB42B}"/>
+                <a16:creationId xmlns:a16="http://schemas.microsoft.com/office/drawing/2014/main" id="{8E4C8FDD-88AF-4254-8099-231DE0E233CE}"/>
               </a:ext>
             </a:extLst>
           </p:cNvPr>
@@ -6505,7 +6505,7 @@
           <p:cNvPr id="21" name="">
             <a:extLst xmlns:a="http://schemas.openxmlformats.org/drawingml/2006/main">
               <a:ext uri="{FF2B5EF4-FFF2-40B4-BE49-F238E27FC236}">
-                <a16:creationId xmlns:a16="http://schemas.microsoft.com/office/drawing/2014/main" id="{634DE7B8-6037-4141-916F-7AC394E1628B}"/>
+                <a16:creationId xmlns:a16="http://schemas.microsoft.com/office/drawing/2014/main" id="{4AAE1BEE-CE64-484C-9103-B1A550841117}"/>
               </a:ext>
             </a:extLst>
           </p:cNvPr>
@@ -6562,7 +6562,7 @@
           <p:cNvPr id="22" name="">
             <a:extLst xmlns:a="http://schemas.openxmlformats.org/drawingml/2006/main">
               <a:ext uri="{FF2B5EF4-FFF2-40B4-BE49-F238E27FC236}">
-                <a16:creationId xmlns:a16="http://schemas.microsoft.com/office/drawing/2014/main" id="{20562354-6BD6-4BBD-86C1-4FE24C4AE20E}"/>
+                <a16:creationId xmlns:a16="http://schemas.microsoft.com/office/drawing/2014/main" id="{A93A04DD-4DEF-42C6-BB96-732ADA4AEE0F}"/>
               </a:ext>
             </a:extLst>
           </p:cNvPr>
@@ -6617,7 +6617,7 @@
     </p:spTree>
     <p:extLst>
       <p:ext uri="{BB962C8B-B14F-4D97-AF65-F5344CB8AC3E}">
-        <p14:creationId xmlns:p14="http://schemas.microsoft.com/office/powerpoint/2010/main" val="797102160"/>
+        <p14:creationId xmlns:p14="http://schemas.microsoft.com/office/powerpoint/2010/main" val="1309828271"/>
       </p:ext>
     </p:extLst>
   </p:cSld>
@@ -6818,7 +6818,7 @@
           <p:cNvPr id="16" name="">
             <a:extLst xmlns:a="http://schemas.openxmlformats.org/drawingml/2006/main">
               <a:ext uri="{FF2B5EF4-FFF2-40B4-BE49-F238E27FC236}">
-                <a16:creationId xmlns:a16="http://schemas.microsoft.com/office/drawing/2014/main" id="{7CD6743A-24A9-495E-B298-42EDEA24BB46}"/>
+                <a16:creationId xmlns:a16="http://schemas.microsoft.com/office/drawing/2014/main" id="{9BE3C586-C0D0-4EE8-A43D-131BF8A34998}"/>
               </a:ext>
             </a:extLst>
           </p:cNvPr>
@@ -6850,7 +6850,7 @@
           <p:cNvPr id="2" name="">
             <a:extLst xmlns:a="http://schemas.openxmlformats.org/drawingml/2006/main">
               <a:ext uri="{FF2B5EF4-FFF2-40B4-BE49-F238E27FC236}">
-                <a16:creationId xmlns:a16="http://schemas.microsoft.com/office/drawing/2014/main" id="{CAE9B07C-FAB8-474A-979E-693F211E04D8}"/>
+                <a16:creationId xmlns:a16="http://schemas.microsoft.com/office/drawing/2014/main" id="{A77949D0-E530-48B5-824E-4969AEAE22CE}"/>
               </a:ext>
             </a:extLst>
           </p:cNvPr>
@@ -6907,7 +6907,7 @@
           <p:cNvPr id="3" name="">
             <a:extLst xmlns:a="http://schemas.openxmlformats.org/drawingml/2006/main">
               <a:ext uri="{FF2B5EF4-FFF2-40B4-BE49-F238E27FC236}">
-                <a16:creationId xmlns:a16="http://schemas.microsoft.com/office/drawing/2014/main" id="{491314DD-0C22-4B8B-B6D1-FC440CB8D50A}"/>
+                <a16:creationId xmlns:a16="http://schemas.microsoft.com/office/drawing/2014/main" id="{EABCB031-6B2D-45E6-9677-096D5F23BA89}"/>
               </a:ext>
             </a:extLst>
           </p:cNvPr>
@@ -6939,7 +6939,7 @@
           <p:cNvPr id="4" name="">
             <a:extLst xmlns:a="http://schemas.openxmlformats.org/drawingml/2006/main">
               <a:ext uri="{FF2B5EF4-FFF2-40B4-BE49-F238E27FC236}">
-                <a16:creationId xmlns:a16="http://schemas.microsoft.com/office/drawing/2014/main" id="{7750EE72-24CE-4DB6-975B-67632FFE118B}"/>
+                <a16:creationId xmlns:a16="http://schemas.microsoft.com/office/drawing/2014/main" id="{539C9806-00EE-4FBC-86BD-98DBC41F52DA}"/>
               </a:ext>
             </a:extLst>
           </p:cNvPr>
@@ -6996,7 +6996,7 @@
           <p:cNvPr id="5" name="">
             <a:extLst xmlns:a="http://schemas.openxmlformats.org/drawingml/2006/main">
               <a:ext uri="{FF2B5EF4-FFF2-40B4-BE49-F238E27FC236}">
-                <a16:creationId xmlns:a16="http://schemas.microsoft.com/office/drawing/2014/main" id="{D4258248-7E3F-4711-982A-261B5D49D1CF}"/>
+                <a16:creationId xmlns:a16="http://schemas.microsoft.com/office/drawing/2014/main" id="{8ED8B232-6D7F-4B95-BDD4-9AE7E6C2FB9B}"/>
               </a:ext>
             </a:extLst>
           </p:cNvPr>
@@ -7053,7 +7053,7 @@
           <p:cNvPr id="6" name="">
             <a:extLst xmlns:a="http://schemas.openxmlformats.org/drawingml/2006/main">
               <a:ext uri="{FF2B5EF4-FFF2-40B4-BE49-F238E27FC236}">
-                <a16:creationId xmlns:a16="http://schemas.microsoft.com/office/drawing/2014/main" id="{78E60BB3-D249-4C1B-A746-64290AE38A80}"/>
+                <a16:creationId xmlns:a16="http://schemas.microsoft.com/office/drawing/2014/main" id="{8337142B-323F-4A04-8F5D-49F34793AFAA}"/>
               </a:ext>
             </a:extLst>
           </p:cNvPr>
@@ -7110,7 +7110,7 @@
           <p:cNvPr id="7" name="">
             <a:extLst xmlns:a="http://schemas.openxmlformats.org/drawingml/2006/main">
               <a:ext uri="{FF2B5EF4-FFF2-40B4-BE49-F238E27FC236}">
-                <a16:creationId xmlns:a16="http://schemas.microsoft.com/office/drawing/2014/main" id="{660AB283-A12F-405F-A8F8-FC79CF1EEBC5}"/>
+                <a16:creationId xmlns:a16="http://schemas.microsoft.com/office/drawing/2014/main" id="{3DFF4C80-AA39-4DDC-BD23-E2FF0D2B83CD}"/>
               </a:ext>
             </a:extLst>
           </p:cNvPr>
@@ -7142,7 +7142,7 @@
           <p:cNvPr id="8" name="">
             <a:extLst xmlns:a="http://schemas.openxmlformats.org/drawingml/2006/main">
               <a:ext uri="{FF2B5EF4-FFF2-40B4-BE49-F238E27FC236}">
-                <a16:creationId xmlns:a16="http://schemas.microsoft.com/office/drawing/2014/main" id="{4F6A1820-7DF8-44F2-91C1-6E3D4615E026}"/>
+                <a16:creationId xmlns:a16="http://schemas.microsoft.com/office/drawing/2014/main" id="{73A8F8A6-CDD2-4E9B-8C50-C3CBE523072A}"/>
               </a:ext>
             </a:extLst>
           </p:cNvPr>
@@ -7199,7 +7199,7 @@
           <p:cNvPr id="9" name="">
             <a:extLst xmlns:a="http://schemas.openxmlformats.org/drawingml/2006/main">
               <a:ext uri="{FF2B5EF4-FFF2-40B4-BE49-F238E27FC236}">
-                <a16:creationId xmlns:a16="http://schemas.microsoft.com/office/drawing/2014/main" id="{41050659-9125-4233-83DE-63F49356D919}"/>
+                <a16:creationId xmlns:a16="http://schemas.microsoft.com/office/drawing/2014/main" id="{7BD65821-E2FB-4C6E-8692-BB86101FF72D}"/>
               </a:ext>
             </a:extLst>
           </p:cNvPr>
@@ -7256,7 +7256,7 @@
           <p:cNvPr id="10" name="">
             <a:extLst xmlns:a="http://schemas.openxmlformats.org/drawingml/2006/main">
               <a:ext uri="{FF2B5EF4-FFF2-40B4-BE49-F238E27FC236}">
-                <a16:creationId xmlns:a16="http://schemas.microsoft.com/office/drawing/2014/main" id="{53A23B8E-683C-42F1-AE70-99735AF5F7C1}"/>
+                <a16:creationId xmlns:a16="http://schemas.microsoft.com/office/drawing/2014/main" id="{9688BA30-18D5-401E-AF40-04AAC85D3D29}"/>
               </a:ext>
             </a:extLst>
           </p:cNvPr>
@@ -7313,7 +7313,7 @@
           <p:cNvPr id="11" name="">
             <a:extLst xmlns:a="http://schemas.openxmlformats.org/drawingml/2006/main">
               <a:ext uri="{FF2B5EF4-FFF2-40B4-BE49-F238E27FC236}">
-                <a16:creationId xmlns:a16="http://schemas.microsoft.com/office/drawing/2014/main" id="{398248C2-AD96-4F81-A8C5-0C4F6777275D}"/>
+                <a16:creationId xmlns:a16="http://schemas.microsoft.com/office/drawing/2014/main" id="{4F3F9633-ED6E-438B-B9DF-34462495E99C}"/>
               </a:ext>
             </a:extLst>
           </p:cNvPr>
@@ -7345,7 +7345,7 @@
           <p:cNvPr id="12" name="">
             <a:extLst xmlns:a="http://schemas.openxmlformats.org/drawingml/2006/main">
               <a:ext uri="{FF2B5EF4-FFF2-40B4-BE49-F238E27FC236}">
-                <a16:creationId xmlns:a16="http://schemas.microsoft.com/office/drawing/2014/main" id="{174A6B36-8A9B-4E22-81DE-810573796604}"/>
+                <a16:creationId xmlns:a16="http://schemas.microsoft.com/office/drawing/2014/main" id="{BD8E919F-9443-46FA-91F9-5D4942ABC335}"/>
               </a:ext>
             </a:extLst>
           </p:cNvPr>
@@ -7402,7 +7402,7 @@
           <p:cNvPr id="13" name="">
             <a:extLst xmlns:a="http://schemas.openxmlformats.org/drawingml/2006/main">
               <a:ext uri="{FF2B5EF4-FFF2-40B4-BE49-F238E27FC236}">
-                <a16:creationId xmlns:a16="http://schemas.microsoft.com/office/drawing/2014/main" id="{1D73CD1A-860D-4417-9D42-6D468E729F7C}"/>
+                <a16:creationId xmlns:a16="http://schemas.microsoft.com/office/drawing/2014/main" id="{63998309-4197-41AB-AC79-5DC18599548D}"/>
               </a:ext>
             </a:extLst>
           </p:cNvPr>
@@ -7459,7 +7459,7 @@
           <p:cNvPr id="14" name="">
             <a:extLst xmlns:a="http://schemas.openxmlformats.org/drawingml/2006/main">
               <a:ext uri="{FF2B5EF4-FFF2-40B4-BE49-F238E27FC236}">
-                <a16:creationId xmlns:a16="http://schemas.microsoft.com/office/drawing/2014/main" id="{949D92E9-41C3-4FFC-B515-123242408AAB}"/>
+                <a16:creationId xmlns:a16="http://schemas.microsoft.com/office/drawing/2014/main" id="{5FA4BCC9-B329-41AB-9629-98BA3A1B69F8}"/>
               </a:ext>
             </a:extLst>
           </p:cNvPr>
@@ -7516,7 +7516,7 @@
           <p:cNvPr id="15" name="">
             <a:extLst xmlns:a="http://schemas.openxmlformats.org/drawingml/2006/main">
               <a:ext uri="{FF2B5EF4-FFF2-40B4-BE49-F238E27FC236}">
-                <a16:creationId xmlns:a16="http://schemas.microsoft.com/office/drawing/2014/main" id="{08E13BB8-60B3-4C80-8A25-38FB5331FA95}"/>
+                <a16:creationId xmlns:a16="http://schemas.microsoft.com/office/drawing/2014/main" id="{629011D2-AEAF-4D63-96C7-F856ED2CAFD8}"/>
               </a:ext>
             </a:extLst>
           </p:cNvPr>
@@ -7571,7 +7571,7 @@
     </p:spTree>
     <p:extLst>
       <p:ext uri="{BB962C8B-B14F-4D97-AF65-F5344CB8AC3E}">
-        <p14:creationId xmlns:p14="http://schemas.microsoft.com/office/powerpoint/2010/main" val="1996406457"/>
+        <p14:creationId xmlns:p14="http://schemas.microsoft.com/office/powerpoint/2010/main" val="1849807974"/>
       </p:ext>
     </p:extLst>
   </p:cSld>
@@ -7772,7 +7772,7 @@
           <p:cNvPr id="23" name="">
             <a:extLst xmlns:a="http://schemas.openxmlformats.org/drawingml/2006/main">
               <a:ext uri="{FF2B5EF4-FFF2-40B4-BE49-F238E27FC236}">
-                <a16:creationId xmlns:a16="http://schemas.microsoft.com/office/drawing/2014/main" id="{0F6419D4-11FA-4170-AAD1-5D1F856D1399}"/>
+                <a16:creationId xmlns:a16="http://schemas.microsoft.com/office/drawing/2014/main" id="{9154559D-5FCF-4DB6-8F16-ED1AFC7FA8FE}"/>
               </a:ext>
             </a:extLst>
           </p:cNvPr>
@@ -7804,7 +7804,7 @@
           <p:cNvPr id="2" name="">
             <a:extLst xmlns:a="http://schemas.openxmlformats.org/drawingml/2006/main">
               <a:ext uri="{FF2B5EF4-FFF2-40B4-BE49-F238E27FC236}">
-                <a16:creationId xmlns:a16="http://schemas.microsoft.com/office/drawing/2014/main" id="{68808F29-9D72-4F7C-9E18-50E8219A1126}"/>
+                <a16:creationId xmlns:a16="http://schemas.microsoft.com/office/drawing/2014/main" id="{0A0B559F-C436-4957-B492-2CB75D8C1CBB}"/>
               </a:ext>
             </a:extLst>
           </p:cNvPr>
@@ -7861,7 +7861,7 @@
           <p:cNvPr id="3" name="">
             <a:extLst xmlns:a="http://schemas.openxmlformats.org/drawingml/2006/main">
               <a:ext uri="{FF2B5EF4-FFF2-40B4-BE49-F238E27FC236}">
-                <a16:creationId xmlns:a16="http://schemas.microsoft.com/office/drawing/2014/main" id="{B370ABAF-22E9-486C-BA59-760B5A4D2035}"/>
+                <a16:creationId xmlns:a16="http://schemas.microsoft.com/office/drawing/2014/main" id="{4603E407-260E-4460-97FA-CEB50F0CF84C}"/>
               </a:ext>
             </a:extLst>
           </p:cNvPr>
@@ -7893,7 +7893,7 @@
           <p:cNvPr id="4" name="">
             <a:extLst xmlns:a="http://schemas.openxmlformats.org/drawingml/2006/main">
               <a:ext uri="{FF2B5EF4-FFF2-40B4-BE49-F238E27FC236}">
-                <a16:creationId xmlns:a16="http://schemas.microsoft.com/office/drawing/2014/main" id="{A4CEF2C2-95E7-4B4F-8543-2BA73B2514C8}"/>
+                <a16:creationId xmlns:a16="http://schemas.microsoft.com/office/drawing/2014/main" id="{ACC4B662-524D-4CB8-BF79-5F67C63E3DCF}"/>
               </a:ext>
             </a:extLst>
           </p:cNvPr>
@@ -7950,7 +7950,7 @@
           <p:cNvPr id="5" name="">
             <a:extLst xmlns:a="http://schemas.openxmlformats.org/drawingml/2006/main">
               <a:ext uri="{FF2B5EF4-FFF2-40B4-BE49-F238E27FC236}">
-                <a16:creationId xmlns:a16="http://schemas.microsoft.com/office/drawing/2014/main" id="{9BFBE8C8-AD7C-4D40-BE14-385E51035A2D}"/>
+                <a16:creationId xmlns:a16="http://schemas.microsoft.com/office/drawing/2014/main" id="{CF74A365-C285-4BE0-A906-CEEDFE220AF7}"/>
               </a:ext>
             </a:extLst>
           </p:cNvPr>
@@ -8007,7 +8007,7 @@
           <p:cNvPr id="6" name="">
             <a:extLst xmlns:a="http://schemas.openxmlformats.org/drawingml/2006/main">
               <a:ext uri="{FF2B5EF4-FFF2-40B4-BE49-F238E27FC236}">
-                <a16:creationId xmlns:a16="http://schemas.microsoft.com/office/drawing/2014/main" id="{69D4C751-6F59-4B93-BDC1-679E426C357F}"/>
+                <a16:creationId xmlns:a16="http://schemas.microsoft.com/office/drawing/2014/main" id="{E4459B77-781A-4B41-A6EB-747FFB9AED7B}"/>
               </a:ext>
             </a:extLst>
           </p:cNvPr>
@@ -8064,7 +8064,7 @@
           <p:cNvPr id="7" name="">
             <a:extLst xmlns:a="http://schemas.openxmlformats.org/drawingml/2006/main">
               <a:ext uri="{FF2B5EF4-FFF2-40B4-BE49-F238E27FC236}">
-                <a16:creationId xmlns:a16="http://schemas.microsoft.com/office/drawing/2014/main" id="{7E06238E-F5CA-4F58-8568-BFAD21FF5D62}"/>
+                <a16:creationId xmlns:a16="http://schemas.microsoft.com/office/drawing/2014/main" id="{B8898CE5-AA1B-496B-973B-88744144734B}"/>
               </a:ext>
             </a:extLst>
           </p:cNvPr>
@@ -8096,7 +8096,7 @@
           <p:cNvPr id="8" name="">
             <a:extLst xmlns:a="http://schemas.openxmlformats.org/drawingml/2006/main">
               <a:ext uri="{FF2B5EF4-FFF2-40B4-BE49-F238E27FC236}">
-                <a16:creationId xmlns:a16="http://schemas.microsoft.com/office/drawing/2014/main" id="{27A3C29C-89DE-423D-B7D0-03D7CF773767}"/>
+                <a16:creationId xmlns:a16="http://schemas.microsoft.com/office/drawing/2014/main" id="{A9AA2E11-B53D-448B-9160-06400B1157A6}"/>
               </a:ext>
             </a:extLst>
           </p:cNvPr>
@@ -8153,7 +8153,7 @@
           <p:cNvPr id="9" name="">
             <a:extLst xmlns:a="http://schemas.openxmlformats.org/drawingml/2006/main">
               <a:ext uri="{FF2B5EF4-FFF2-40B4-BE49-F238E27FC236}">
-                <a16:creationId xmlns:a16="http://schemas.microsoft.com/office/drawing/2014/main" id="{FFED1C32-1C32-453E-88E6-318F787652F7}"/>
+                <a16:creationId xmlns:a16="http://schemas.microsoft.com/office/drawing/2014/main" id="{925A9E1C-63BA-492C-A30F-62F4B4639865}"/>
               </a:ext>
             </a:extLst>
           </p:cNvPr>
@@ -8210,19 +8210,19 @@
           <p:cNvPr id="10" name="">
             <a:extLst xmlns:a="http://schemas.openxmlformats.org/drawingml/2006/main">
               <a:ext uri="{FF2B5EF4-FFF2-40B4-BE49-F238E27FC236}">
-                <a16:creationId xmlns:a16="http://schemas.microsoft.com/office/drawing/2014/main" id="{9200DB20-E319-4392-9FB2-DDEE1F4A6586}"/>
-              </a:ext>
-            </a:extLst>
-          </p:cNvPr>
-          <p:cNvSpPr>
-            <a:spLocks xmlns:a="http://schemas.openxmlformats.org/drawingml/2006/main" noGrp="1"/>
-          </p:cNvSpPr>
-          <p:nvPr/>
-        </p:nvSpPr>
-        <p:spPr>
-          <a:xfrm xmlns:a="http://schemas.openxmlformats.org/drawingml/2006/main">
-            <a:off x="914400" y="1257300"/>
-            <a:ext cx="10363200" cy="781050"/>
+                <a16:creationId xmlns:a16="http://schemas.microsoft.com/office/drawing/2014/main" id="{9491A0DA-7579-4F0A-B2E6-0476ACA1E2E2}"/>
+              </a:ext>
+            </a:extLst>
+          </p:cNvPr>
+          <p:cNvSpPr>
+            <a:spLocks xmlns:a="http://schemas.openxmlformats.org/drawingml/2006/main" noGrp="1"/>
+          </p:cNvSpPr>
+          <p:nvPr/>
+        </p:nvSpPr>
+        <p:spPr>
+          <a:xfrm xmlns:a="http://schemas.openxmlformats.org/drawingml/2006/main">
+            <a:off x="857250" y="1219200"/>
+            <a:ext cx="10477500" cy="742950"/>
           </a:xfrm>
           <a:prstGeom xmlns:a="http://schemas.openxmlformats.org/drawingml/2006/main" prst="rect">
             <a:avLst/>
@@ -8239,7 +8239,7 @@
           <a:lstStyle xmlns:a="http://schemas.openxmlformats.org/drawingml/2006/main"/>
           <a:p xmlns:a="http://schemas.openxmlformats.org/drawingml/2006/main">
             <a:pPr algn="ctr">
-              <a:defRPr sz="2175" b="1">
+              <a:defRPr sz="2100" b="1">
                 <a:solidFill>
                   <a:srgbClr val="17253A"/>
                 </a:solidFill>
@@ -8249,7 +8249,7 @@
               </a:defRPr>
             </a:pPr>
             <a:r>
-              <a:rPr sz="2175" b="1">
+              <a:rPr sz="2100" b="1">
                 <a:solidFill>
                   <a:srgbClr val="17253A"/>
                 </a:solidFill>
@@ -8267,28 +8267,30 @@
           <p:cNvPr id="11" name="">
             <a:extLst xmlns:a="http://schemas.openxmlformats.org/drawingml/2006/main">
               <a:ext uri="{FF2B5EF4-FFF2-40B4-BE49-F238E27FC236}">
-                <a16:creationId xmlns:a16="http://schemas.microsoft.com/office/drawing/2014/main" id="{11542127-E6A7-40C3-A20C-2640AD474B63}"/>
-              </a:ext>
-            </a:extLst>
-          </p:cNvPr>
-          <p:cNvSpPr>
-            <a:spLocks xmlns:a="http://schemas.openxmlformats.org/drawingml/2006/main" noGrp="1"/>
-          </p:cNvSpPr>
-          <p:nvPr/>
-        </p:nvSpPr>
-        <p:spPr>
-          <a:xfrm xmlns:a="http://schemas.openxmlformats.org/drawingml/2006/main">
-            <a:off x="1000125" y="2247900"/>
-            <a:ext cx="476250" cy="476250"/>
-          </a:xfrm>
-          <a:prstGeom xmlns:a="http://schemas.openxmlformats.org/drawingml/2006/main" prst="ellipse">
+                <a16:creationId xmlns:a16="http://schemas.microsoft.com/office/drawing/2014/main" id="{2A6D6225-25BB-4C38-862E-D7A5F8D1BC2F}"/>
+              </a:ext>
+            </a:extLst>
+          </p:cNvPr>
+          <p:cNvSpPr>
+            <a:spLocks xmlns:a="http://schemas.openxmlformats.org/drawingml/2006/main" noGrp="1"/>
+          </p:cNvSpPr>
+          <p:nvPr/>
+        </p:nvSpPr>
+        <p:spPr>
+          <a:xfrm xmlns:a="http://schemas.openxmlformats.org/drawingml/2006/main">
+            <a:off x="971550" y="2124075"/>
+            <a:ext cx="38100" cy="3524250"/>
+          </a:xfrm>
+          <a:prstGeom xmlns:a="http://schemas.openxmlformats.org/drawingml/2006/main" prst="rect">
             <a:avLst/>
           </a:prstGeom>
           <a:solidFill xmlns:a="http://schemas.openxmlformats.org/drawingml/2006/main">
-            <a:srgbClr val="18324A"/>
+            <a:srgbClr val="2C6E73"/>
           </a:solidFill>
           <a:ln xmlns:a="http://schemas.openxmlformats.org/drawingml/2006/main" w="0">
-            <a:noFill/>
+            <a:solidFill>
+              <a:srgbClr val="2C6E73"/>
+            </a:solidFill>
           </a:ln>
         </p:spPr>
       </p:sp>
@@ -8297,19 +8299,19 @@
           <p:cNvPr id="12" name="">
             <a:extLst xmlns:a="http://schemas.openxmlformats.org/drawingml/2006/main">
               <a:ext uri="{FF2B5EF4-FFF2-40B4-BE49-F238E27FC236}">
-                <a16:creationId xmlns:a16="http://schemas.microsoft.com/office/drawing/2014/main" id="{B9BF0D81-A481-44D3-8461-23B087C1A6DA}"/>
-              </a:ext>
-            </a:extLst>
-          </p:cNvPr>
-          <p:cNvSpPr>
-            <a:spLocks xmlns:a="http://schemas.openxmlformats.org/drawingml/2006/main" noGrp="1"/>
-          </p:cNvSpPr>
-          <p:nvPr/>
-        </p:nvSpPr>
-        <p:spPr>
-          <a:xfrm xmlns:a="http://schemas.openxmlformats.org/drawingml/2006/main">
-            <a:off x="1000125" y="2276475"/>
-            <a:ext cx="476250" cy="419100"/>
+                <a16:creationId xmlns:a16="http://schemas.microsoft.com/office/drawing/2014/main" id="{6D586225-DB3D-4876-844B-C02BA0F8F32F}"/>
+              </a:ext>
+            </a:extLst>
+          </p:cNvPr>
+          <p:cNvSpPr>
+            <a:spLocks xmlns:a="http://schemas.openxmlformats.org/drawingml/2006/main" noGrp="1"/>
+          </p:cNvSpPr>
+          <p:nvPr/>
+        </p:nvSpPr>
+        <p:spPr>
+          <a:xfrm xmlns:a="http://schemas.openxmlformats.org/drawingml/2006/main">
+            <a:off x="1162050" y="2200275"/>
+            <a:ext cx="400050" cy="400050"/>
           </a:xfrm>
           <a:prstGeom xmlns:a="http://schemas.openxmlformats.org/drawingml/2006/main" prst="rect">
             <a:avLst/>
@@ -8326,9 +8328,9 @@
           <a:lstStyle xmlns:a="http://schemas.openxmlformats.org/drawingml/2006/main"/>
           <a:p xmlns:a="http://schemas.openxmlformats.org/drawingml/2006/main">
             <a:pPr algn="ctr">
-              <a:defRPr sz="1350" b="1">
-                <a:solidFill>
-                  <a:srgbClr val="FFFFFF"/>
+              <a:defRPr sz="1125" b="1">
+                <a:solidFill>
+                  <a:srgbClr val="2C6E73"/>
                 </a:solidFill>
                 <a:latin typeface="Arial"/>
                 <a:ea typeface="Arial"/>
@@ -8336,9 +8338,9 @@
               </a:defRPr>
             </a:pPr>
             <a:r>
-              <a:rPr sz="1350" b="1">
-                <a:solidFill>
-                  <a:srgbClr val="FFFFFF"/>
+              <a:rPr sz="1125" b="1">
+                <a:solidFill>
+                  <a:srgbClr val="2C6E73"/>
                 </a:solidFill>
                 <a:latin typeface="Arial"/>
                 <a:ea typeface="Arial"/>
@@ -8354,19 +8356,19 @@
           <p:cNvPr id="13" name="">
             <a:extLst xmlns:a="http://schemas.openxmlformats.org/drawingml/2006/main">
               <a:ext uri="{FF2B5EF4-FFF2-40B4-BE49-F238E27FC236}">
-                <a16:creationId xmlns:a16="http://schemas.microsoft.com/office/drawing/2014/main" id="{80898F60-B59A-422A-B7AD-06C2C9292758}"/>
-              </a:ext>
-            </a:extLst>
-          </p:cNvPr>
-          <p:cNvSpPr>
-            <a:spLocks xmlns:a="http://schemas.openxmlformats.org/drawingml/2006/main" noGrp="1"/>
-          </p:cNvSpPr>
-          <p:nvPr/>
-        </p:nvSpPr>
-        <p:spPr>
-          <a:xfrm xmlns:a="http://schemas.openxmlformats.org/drawingml/2006/main">
-            <a:off x="1714500" y="2181225"/>
-            <a:ext cx="9429750" cy="609600"/>
+                <a16:creationId xmlns:a16="http://schemas.microsoft.com/office/drawing/2014/main" id="{A086F34A-4A3B-4346-B15F-AC0365A8F3C5}"/>
+              </a:ext>
+            </a:extLst>
+          </p:cNvPr>
+          <p:cNvSpPr>
+            <a:spLocks xmlns:a="http://schemas.openxmlformats.org/drawingml/2006/main" noGrp="1"/>
+          </p:cNvSpPr>
+          <p:nvPr/>
+        </p:nvSpPr>
+        <p:spPr>
+          <a:xfrm xmlns:a="http://schemas.openxmlformats.org/drawingml/2006/main">
+            <a:off x="1714500" y="2114550"/>
+            <a:ext cx="9525000" cy="809625"/>
           </a:xfrm>
           <a:prstGeom xmlns:a="http://schemas.openxmlformats.org/drawingml/2006/main" prst="rect">
             <a:avLst/>
@@ -8383,7 +8385,7 @@
           <a:lstStyle xmlns:a="http://schemas.openxmlformats.org/drawingml/2006/main"/>
           <a:p xmlns:a="http://schemas.openxmlformats.org/drawingml/2006/main">
             <a:pPr algn="l">
-              <a:defRPr sz="1500" b="0">
+              <a:defRPr sz="1725" b="0">
                 <a:solidFill>
                   <a:srgbClr val="17253A"/>
                 </a:solidFill>
@@ -8393,7 +8395,7 @@
               </a:defRPr>
             </a:pPr>
             <a:r>
-              <a:rPr sz="1500" b="0">
+              <a:rPr sz="1725" b="0">
                 <a:solidFill>
                   <a:srgbClr val="17253A"/>
                 </a:solidFill>
@@ -8401,7 +8403,7 @@
                 <a:ea typeface="Arial"/>
                 <a:cs typeface="Arial"/>
               </a:rPr>
-              <a:t>Identify the structure: Represent the fraction as equal parts or use an equivalent multiplication.</a:t>
+              <a:t>2 1/4 ÷ 3</a:t>
             </a:r>
           </a:p>
         </p:txBody>
@@ -8411,28 +8413,30 @@
           <p:cNvPr id="14" name="">
             <a:extLst xmlns:a="http://schemas.openxmlformats.org/drawingml/2006/main">
               <a:ext uri="{FF2B5EF4-FFF2-40B4-BE49-F238E27FC236}">
-                <a16:creationId xmlns:a16="http://schemas.microsoft.com/office/drawing/2014/main" id="{80C69B01-1701-46E7-85A9-DBB6C4452315}"/>
-              </a:ext>
-            </a:extLst>
-          </p:cNvPr>
-          <p:cNvSpPr>
-            <a:spLocks xmlns:a="http://schemas.openxmlformats.org/drawingml/2006/main" noGrp="1"/>
-          </p:cNvSpPr>
-          <p:nvPr/>
-        </p:nvSpPr>
-        <p:spPr>
-          <a:xfrm xmlns:a="http://schemas.openxmlformats.org/drawingml/2006/main">
-            <a:off x="1000125" y="2990850"/>
-            <a:ext cx="476250" cy="476250"/>
-          </a:xfrm>
-          <a:prstGeom xmlns:a="http://schemas.openxmlformats.org/drawingml/2006/main" prst="ellipse">
+                <a16:creationId xmlns:a16="http://schemas.microsoft.com/office/drawing/2014/main" id="{FACBD81C-B950-43C2-B584-798C42223FDE}"/>
+              </a:ext>
+            </a:extLst>
+          </p:cNvPr>
+          <p:cNvSpPr>
+            <a:spLocks xmlns:a="http://schemas.openxmlformats.org/drawingml/2006/main" noGrp="1"/>
+          </p:cNvSpPr>
+          <p:nvPr/>
+        </p:nvSpPr>
+        <p:spPr>
+          <a:xfrm xmlns:a="http://schemas.openxmlformats.org/drawingml/2006/main">
+            <a:off x="1714500" y="2943225"/>
+            <a:ext cx="9334500" cy="9525"/>
+          </a:xfrm>
+          <a:prstGeom xmlns:a="http://schemas.openxmlformats.org/drawingml/2006/main" prst="rect">
             <a:avLst/>
           </a:prstGeom>
           <a:solidFill xmlns:a="http://schemas.openxmlformats.org/drawingml/2006/main">
-            <a:srgbClr val="2C6E73"/>
+            <a:srgbClr val="D9E0E6"/>
           </a:solidFill>
           <a:ln xmlns:a="http://schemas.openxmlformats.org/drawingml/2006/main" w="0">
-            <a:noFill/>
+            <a:solidFill>
+              <a:srgbClr val="D9E0E6"/>
+            </a:solidFill>
           </a:ln>
         </p:spPr>
       </p:sp>
@@ -8441,19 +8445,19 @@
           <p:cNvPr id="15" name="">
             <a:extLst xmlns:a="http://schemas.openxmlformats.org/drawingml/2006/main">
               <a:ext uri="{FF2B5EF4-FFF2-40B4-BE49-F238E27FC236}">
-                <a16:creationId xmlns:a16="http://schemas.microsoft.com/office/drawing/2014/main" id="{CFA7EC53-1B44-4DC2-A1BE-28E76F8C805A}"/>
-              </a:ext>
-            </a:extLst>
-          </p:cNvPr>
-          <p:cNvSpPr>
-            <a:spLocks xmlns:a="http://schemas.openxmlformats.org/drawingml/2006/main" noGrp="1"/>
-          </p:cNvSpPr>
-          <p:nvPr/>
-        </p:nvSpPr>
-        <p:spPr>
-          <a:xfrm xmlns:a="http://schemas.openxmlformats.org/drawingml/2006/main">
-            <a:off x="1000125" y="3019425"/>
-            <a:ext cx="476250" cy="419100"/>
+                <a16:creationId xmlns:a16="http://schemas.microsoft.com/office/drawing/2014/main" id="{D054B01D-E14B-4DB0-9936-0A81EFD22DBA}"/>
+              </a:ext>
+            </a:extLst>
+          </p:cNvPr>
+          <p:cNvSpPr>
+            <a:spLocks xmlns:a="http://schemas.openxmlformats.org/drawingml/2006/main" noGrp="1"/>
+          </p:cNvSpPr>
+          <p:nvPr/>
+        </p:nvSpPr>
+        <p:spPr>
+          <a:xfrm xmlns:a="http://schemas.openxmlformats.org/drawingml/2006/main">
+            <a:off x="1162050" y="3076575"/>
+            <a:ext cx="400050" cy="400050"/>
           </a:xfrm>
           <a:prstGeom xmlns:a="http://schemas.openxmlformats.org/drawingml/2006/main" prst="rect">
             <a:avLst/>
@@ -8470,9 +8474,9 @@
           <a:lstStyle xmlns:a="http://schemas.openxmlformats.org/drawingml/2006/main"/>
           <a:p xmlns:a="http://schemas.openxmlformats.org/drawingml/2006/main">
             <a:pPr algn="ctr">
-              <a:defRPr sz="1350" b="1">
-                <a:solidFill>
-                  <a:srgbClr val="FFFFFF"/>
+              <a:defRPr sz="1125" b="1">
+                <a:solidFill>
+                  <a:srgbClr val="2C6E73"/>
                 </a:solidFill>
                 <a:latin typeface="Arial"/>
                 <a:ea typeface="Arial"/>
@@ -8480,9 +8484,9 @@
               </a:defRPr>
             </a:pPr>
             <a:r>
-              <a:rPr sz="1350" b="1">
-                <a:solidFill>
-                  <a:srgbClr val="FFFFFF"/>
+              <a:rPr sz="1125" b="1">
+                <a:solidFill>
+                  <a:srgbClr val="2C6E73"/>
                 </a:solidFill>
                 <a:latin typeface="Arial"/>
                 <a:ea typeface="Arial"/>
@@ -8498,19 +8502,19 @@
           <p:cNvPr id="16" name="">
             <a:extLst xmlns:a="http://schemas.openxmlformats.org/drawingml/2006/main">
               <a:ext uri="{FF2B5EF4-FFF2-40B4-BE49-F238E27FC236}">
-                <a16:creationId xmlns:a16="http://schemas.microsoft.com/office/drawing/2014/main" id="{AA9F057B-13F8-4C85-9E0B-B07D4C00C8B4}"/>
-              </a:ext>
-            </a:extLst>
-          </p:cNvPr>
-          <p:cNvSpPr>
-            <a:spLocks xmlns:a="http://schemas.openxmlformats.org/drawingml/2006/main" noGrp="1"/>
-          </p:cNvSpPr>
-          <p:nvPr/>
-        </p:nvSpPr>
-        <p:spPr>
-          <a:xfrm xmlns:a="http://schemas.openxmlformats.org/drawingml/2006/main">
-            <a:off x="1714500" y="2924175"/>
-            <a:ext cx="9429750" cy="609600"/>
+                <a16:creationId xmlns:a16="http://schemas.microsoft.com/office/drawing/2014/main" id="{DB0F4A62-A8A5-4E8C-9537-9B797097D419}"/>
+              </a:ext>
+            </a:extLst>
+          </p:cNvPr>
+          <p:cNvSpPr>
+            <a:spLocks xmlns:a="http://schemas.openxmlformats.org/drawingml/2006/main" noGrp="1"/>
+          </p:cNvSpPr>
+          <p:nvPr/>
+        </p:nvSpPr>
+        <p:spPr>
+          <a:xfrm xmlns:a="http://schemas.openxmlformats.org/drawingml/2006/main">
+            <a:off x="1714500" y="2990850"/>
+            <a:ext cx="9525000" cy="809625"/>
           </a:xfrm>
           <a:prstGeom xmlns:a="http://schemas.openxmlformats.org/drawingml/2006/main" prst="rect">
             <a:avLst/>
@@ -8527,7 +8531,7 @@
           <a:lstStyle xmlns:a="http://schemas.openxmlformats.org/drawingml/2006/main"/>
           <a:p xmlns:a="http://schemas.openxmlformats.org/drawingml/2006/main">
             <a:pPr algn="l">
-              <a:defRPr sz="1500" b="0">
+              <a:defRPr sz="1725" b="0">
                 <a:solidFill>
                   <a:srgbClr val="17253A"/>
                 </a:solidFill>
@@ -8537,7 +8541,7 @@
               </a:defRPr>
             </a:pPr>
             <a:r>
-              <a:rPr sz="1500" b="0">
+              <a:rPr sz="1725" b="0">
                 <a:solidFill>
                   <a:srgbClr val="17253A"/>
                 </a:solidFill>
@@ -8545,7 +8549,7 @@
                 <a:ea typeface="Arial"/>
                 <a:cs typeface="Arial"/>
               </a:rPr>
-              <a:t>Set up the method: Divide the numerator when possible or multiply the denominator by the whole number.</a:t>
+              <a:t>2 1/4 = 9/4</a:t>
             </a:r>
           </a:p>
         </p:txBody>
@@ -8555,28 +8559,30 @@
           <p:cNvPr id="17" name="">
             <a:extLst xmlns:a="http://schemas.openxmlformats.org/drawingml/2006/main">
               <a:ext uri="{FF2B5EF4-FFF2-40B4-BE49-F238E27FC236}">
-                <a16:creationId xmlns:a16="http://schemas.microsoft.com/office/drawing/2014/main" id="{A5ED7DFD-670D-4633-8149-16CCE723F42C}"/>
-              </a:ext>
-            </a:extLst>
-          </p:cNvPr>
-          <p:cNvSpPr>
-            <a:spLocks xmlns:a="http://schemas.openxmlformats.org/drawingml/2006/main" noGrp="1"/>
-          </p:cNvSpPr>
-          <p:nvPr/>
-        </p:nvSpPr>
-        <p:spPr>
-          <a:xfrm xmlns:a="http://schemas.openxmlformats.org/drawingml/2006/main">
-            <a:off x="1000125" y="3733800"/>
-            <a:ext cx="476250" cy="476250"/>
-          </a:xfrm>
-          <a:prstGeom xmlns:a="http://schemas.openxmlformats.org/drawingml/2006/main" prst="ellipse">
+                <a16:creationId xmlns:a16="http://schemas.microsoft.com/office/drawing/2014/main" id="{BF07886C-996B-471D-AABC-CFA2BEA12625}"/>
+              </a:ext>
+            </a:extLst>
+          </p:cNvPr>
+          <p:cNvSpPr>
+            <a:spLocks xmlns:a="http://schemas.openxmlformats.org/drawingml/2006/main" noGrp="1"/>
+          </p:cNvSpPr>
+          <p:nvPr/>
+        </p:nvSpPr>
+        <p:spPr>
+          <a:xfrm xmlns:a="http://schemas.openxmlformats.org/drawingml/2006/main">
+            <a:off x="1714500" y="3819525"/>
+            <a:ext cx="9334500" cy="9525"/>
+          </a:xfrm>
+          <a:prstGeom xmlns:a="http://schemas.openxmlformats.org/drawingml/2006/main" prst="rect">
             <a:avLst/>
           </a:prstGeom>
           <a:solidFill xmlns:a="http://schemas.openxmlformats.org/drawingml/2006/main">
-            <a:srgbClr val="2C6E73"/>
+            <a:srgbClr val="D9E0E6"/>
           </a:solidFill>
           <a:ln xmlns:a="http://schemas.openxmlformats.org/drawingml/2006/main" w="0">
-            <a:noFill/>
+            <a:solidFill>
+              <a:srgbClr val="D9E0E6"/>
+            </a:solidFill>
           </a:ln>
         </p:spPr>
       </p:sp>
@@ -8585,19 +8591,19 @@
           <p:cNvPr id="18" name="">
             <a:extLst xmlns:a="http://schemas.openxmlformats.org/drawingml/2006/main">
               <a:ext uri="{FF2B5EF4-FFF2-40B4-BE49-F238E27FC236}">
-                <a16:creationId xmlns:a16="http://schemas.microsoft.com/office/drawing/2014/main" id="{B1A1E4CE-6CB3-46A1-9E46-3FCE84349E9B}"/>
-              </a:ext>
-            </a:extLst>
-          </p:cNvPr>
-          <p:cNvSpPr>
-            <a:spLocks xmlns:a="http://schemas.openxmlformats.org/drawingml/2006/main" noGrp="1"/>
-          </p:cNvSpPr>
-          <p:nvPr/>
-        </p:nvSpPr>
-        <p:spPr>
-          <a:xfrm xmlns:a="http://schemas.openxmlformats.org/drawingml/2006/main">
-            <a:off x="1000125" y="3762375"/>
-            <a:ext cx="476250" cy="419100"/>
+                <a16:creationId xmlns:a16="http://schemas.microsoft.com/office/drawing/2014/main" id="{E93B71E6-B9C9-49C6-ADB6-24A50697F036}"/>
+              </a:ext>
+            </a:extLst>
+          </p:cNvPr>
+          <p:cNvSpPr>
+            <a:spLocks xmlns:a="http://schemas.openxmlformats.org/drawingml/2006/main" noGrp="1"/>
+          </p:cNvSpPr>
+          <p:nvPr/>
+        </p:nvSpPr>
+        <p:spPr>
+          <a:xfrm xmlns:a="http://schemas.openxmlformats.org/drawingml/2006/main">
+            <a:off x="1162050" y="3952875"/>
+            <a:ext cx="400050" cy="400050"/>
           </a:xfrm>
           <a:prstGeom xmlns:a="http://schemas.openxmlformats.org/drawingml/2006/main" prst="rect">
             <a:avLst/>
@@ -8614,9 +8620,9 @@
           <a:lstStyle xmlns:a="http://schemas.openxmlformats.org/drawingml/2006/main"/>
           <a:p xmlns:a="http://schemas.openxmlformats.org/drawingml/2006/main">
             <a:pPr algn="ctr">
-              <a:defRPr sz="1350" b="1">
-                <a:solidFill>
-                  <a:srgbClr val="FFFFFF"/>
+              <a:defRPr sz="1125" b="1">
+                <a:solidFill>
+                  <a:srgbClr val="2C6E73"/>
                 </a:solidFill>
                 <a:latin typeface="Arial"/>
                 <a:ea typeface="Arial"/>
@@ -8624,9 +8630,9 @@
               </a:defRPr>
             </a:pPr>
             <a:r>
-              <a:rPr sz="1350" b="1">
-                <a:solidFill>
-                  <a:srgbClr val="FFFFFF"/>
+              <a:rPr sz="1125" b="1">
+                <a:solidFill>
+                  <a:srgbClr val="2C6E73"/>
                 </a:solidFill>
                 <a:latin typeface="Arial"/>
                 <a:ea typeface="Arial"/>
@@ -8642,19 +8648,19 @@
           <p:cNvPr id="19" name="">
             <a:extLst xmlns:a="http://schemas.openxmlformats.org/drawingml/2006/main">
               <a:ext uri="{FF2B5EF4-FFF2-40B4-BE49-F238E27FC236}">
-                <a16:creationId xmlns:a16="http://schemas.microsoft.com/office/drawing/2014/main" id="{D45C7D56-43EA-4E1D-8E64-708101916B55}"/>
-              </a:ext>
-            </a:extLst>
-          </p:cNvPr>
-          <p:cNvSpPr>
-            <a:spLocks xmlns:a="http://schemas.openxmlformats.org/drawingml/2006/main" noGrp="1"/>
-          </p:cNvSpPr>
-          <p:nvPr/>
-        </p:nvSpPr>
-        <p:spPr>
-          <a:xfrm xmlns:a="http://schemas.openxmlformats.org/drawingml/2006/main">
-            <a:off x="1714500" y="3667125"/>
-            <a:ext cx="9429750" cy="609600"/>
+                <a16:creationId xmlns:a16="http://schemas.microsoft.com/office/drawing/2014/main" id="{5D56CD63-6B1C-4BD4-B321-09293E1D4685}"/>
+              </a:ext>
+            </a:extLst>
+          </p:cNvPr>
+          <p:cNvSpPr>
+            <a:spLocks xmlns:a="http://schemas.openxmlformats.org/drawingml/2006/main" noGrp="1"/>
+          </p:cNvSpPr>
+          <p:nvPr/>
+        </p:nvSpPr>
+        <p:spPr>
+          <a:xfrm xmlns:a="http://schemas.openxmlformats.org/drawingml/2006/main">
+            <a:off x="1714500" y="3867150"/>
+            <a:ext cx="9525000" cy="809625"/>
           </a:xfrm>
           <a:prstGeom xmlns:a="http://schemas.openxmlformats.org/drawingml/2006/main" prst="rect">
             <a:avLst/>
@@ -8671,7 +8677,7 @@
           <a:lstStyle xmlns:a="http://schemas.openxmlformats.org/drawingml/2006/main"/>
           <a:p xmlns:a="http://schemas.openxmlformats.org/drawingml/2006/main">
             <a:pPr algn="l">
-              <a:defRPr sz="1500" b="0">
+              <a:defRPr sz="1725" b="0">
                 <a:solidFill>
                   <a:srgbClr val="17253A"/>
                 </a:solidFill>
@@ -8681,7 +8687,7 @@
               </a:defRPr>
             </a:pPr>
             <a:r>
-              <a:rPr sz="1500" b="0">
+              <a:rPr sz="1725" b="0">
                 <a:solidFill>
                   <a:srgbClr val="17253A"/>
                 </a:solidFill>
@@ -8689,7 +8695,7 @@
                 <a:ea typeface="Arial"/>
                 <a:cs typeface="Arial"/>
               </a:rPr>
-              <a:t>Complete the calculation: 3/4.</a:t>
+              <a:t>9/4 × 1/3 = 9/12</a:t>
             </a:r>
           </a:p>
         </p:txBody>
@@ -8699,28 +8705,30 @@
           <p:cNvPr id="20" name="">
             <a:extLst xmlns:a="http://schemas.openxmlformats.org/drawingml/2006/main">
               <a:ext uri="{FF2B5EF4-FFF2-40B4-BE49-F238E27FC236}">
-                <a16:creationId xmlns:a16="http://schemas.microsoft.com/office/drawing/2014/main" id="{0D52846B-9684-4865-8648-3A1FFCAE3AD0}"/>
-              </a:ext>
-            </a:extLst>
-          </p:cNvPr>
-          <p:cNvSpPr>
-            <a:spLocks xmlns:a="http://schemas.openxmlformats.org/drawingml/2006/main" noGrp="1"/>
-          </p:cNvSpPr>
-          <p:nvPr/>
-        </p:nvSpPr>
-        <p:spPr>
-          <a:xfrm xmlns:a="http://schemas.openxmlformats.org/drawingml/2006/main">
-            <a:off x="1000125" y="4476750"/>
-            <a:ext cx="476250" cy="476250"/>
-          </a:xfrm>
-          <a:prstGeom xmlns:a="http://schemas.openxmlformats.org/drawingml/2006/main" prst="ellipse">
+                <a16:creationId xmlns:a16="http://schemas.microsoft.com/office/drawing/2014/main" id="{87FB9E9B-FF3E-417D-9B13-735621373E39}"/>
+              </a:ext>
+            </a:extLst>
+          </p:cNvPr>
+          <p:cNvSpPr>
+            <a:spLocks xmlns:a="http://schemas.openxmlformats.org/drawingml/2006/main" noGrp="1"/>
+          </p:cNvSpPr>
+          <p:nvPr/>
+        </p:nvSpPr>
+        <p:spPr>
+          <a:xfrm xmlns:a="http://schemas.openxmlformats.org/drawingml/2006/main">
+            <a:off x="1714500" y="4695825"/>
+            <a:ext cx="9334500" cy="9525"/>
+          </a:xfrm>
+          <a:prstGeom xmlns:a="http://schemas.openxmlformats.org/drawingml/2006/main" prst="rect">
             <a:avLst/>
           </a:prstGeom>
           <a:solidFill xmlns:a="http://schemas.openxmlformats.org/drawingml/2006/main">
-            <a:srgbClr val="2C6E73"/>
+            <a:srgbClr val="D9E0E6"/>
           </a:solidFill>
           <a:ln xmlns:a="http://schemas.openxmlformats.org/drawingml/2006/main" w="0">
-            <a:noFill/>
+            <a:solidFill>
+              <a:srgbClr val="D9E0E6"/>
+            </a:solidFill>
           </a:ln>
         </p:spPr>
       </p:sp>
@@ -8729,19 +8737,19 @@
           <p:cNvPr id="21" name="">
             <a:extLst xmlns:a="http://schemas.openxmlformats.org/drawingml/2006/main">
               <a:ext uri="{FF2B5EF4-FFF2-40B4-BE49-F238E27FC236}">
-                <a16:creationId xmlns:a16="http://schemas.microsoft.com/office/drawing/2014/main" id="{06642AEC-12C3-4984-B3E9-EBB4186C46AD}"/>
-              </a:ext>
-            </a:extLst>
-          </p:cNvPr>
-          <p:cNvSpPr>
-            <a:spLocks xmlns:a="http://schemas.openxmlformats.org/drawingml/2006/main" noGrp="1"/>
-          </p:cNvSpPr>
-          <p:nvPr/>
-        </p:nvSpPr>
-        <p:spPr>
-          <a:xfrm xmlns:a="http://schemas.openxmlformats.org/drawingml/2006/main">
-            <a:off x="1000125" y="4505325"/>
-            <a:ext cx="476250" cy="419100"/>
+                <a16:creationId xmlns:a16="http://schemas.microsoft.com/office/drawing/2014/main" id="{F7F63550-C0A0-4882-AC17-7B9A438FB047}"/>
+              </a:ext>
+            </a:extLst>
+          </p:cNvPr>
+          <p:cNvSpPr>
+            <a:spLocks xmlns:a="http://schemas.openxmlformats.org/drawingml/2006/main" noGrp="1"/>
+          </p:cNvSpPr>
+          <p:nvPr/>
+        </p:nvSpPr>
+        <p:spPr>
+          <a:xfrm xmlns:a="http://schemas.openxmlformats.org/drawingml/2006/main">
+            <a:off x="1162050" y="4829175"/>
+            <a:ext cx="400050" cy="400050"/>
           </a:xfrm>
           <a:prstGeom xmlns:a="http://schemas.openxmlformats.org/drawingml/2006/main" prst="rect">
             <a:avLst/>
@@ -8758,9 +8766,9 @@
           <a:lstStyle xmlns:a="http://schemas.openxmlformats.org/drawingml/2006/main"/>
           <a:p xmlns:a="http://schemas.openxmlformats.org/drawingml/2006/main">
             <a:pPr algn="ctr">
-              <a:defRPr sz="1350" b="1">
-                <a:solidFill>
-                  <a:srgbClr val="FFFFFF"/>
+              <a:defRPr sz="1125" b="1">
+                <a:solidFill>
+                  <a:srgbClr val="2F785D"/>
                 </a:solidFill>
                 <a:latin typeface="Arial"/>
                 <a:ea typeface="Arial"/>
@@ -8768,9 +8776,9 @@
               </a:defRPr>
             </a:pPr>
             <a:r>
-              <a:rPr sz="1350" b="1">
-                <a:solidFill>
-                  <a:srgbClr val="FFFFFF"/>
+              <a:rPr sz="1125" b="1">
+                <a:solidFill>
+                  <a:srgbClr val="2F785D"/>
                 </a:solidFill>
                 <a:latin typeface="Arial"/>
                 <a:ea typeface="Arial"/>
@@ -8786,19 +8794,19 @@
           <p:cNvPr id="22" name="">
             <a:extLst xmlns:a="http://schemas.openxmlformats.org/drawingml/2006/main">
               <a:ext uri="{FF2B5EF4-FFF2-40B4-BE49-F238E27FC236}">
-                <a16:creationId xmlns:a16="http://schemas.microsoft.com/office/drawing/2014/main" id="{42FDB0FD-D7FC-436E-80ED-85AB9A07E0C0}"/>
-              </a:ext>
-            </a:extLst>
-          </p:cNvPr>
-          <p:cNvSpPr>
-            <a:spLocks xmlns:a="http://schemas.openxmlformats.org/drawingml/2006/main" noGrp="1"/>
-          </p:cNvSpPr>
-          <p:nvPr/>
-        </p:nvSpPr>
-        <p:spPr>
-          <a:xfrm xmlns:a="http://schemas.openxmlformats.org/drawingml/2006/main">
-            <a:off x="1714500" y="4410075"/>
-            <a:ext cx="9429750" cy="609600"/>
+                <a16:creationId xmlns:a16="http://schemas.microsoft.com/office/drawing/2014/main" id="{78245FEE-6185-4337-B1B5-D7C4085632CB}"/>
+              </a:ext>
+            </a:extLst>
+          </p:cNvPr>
+          <p:cNvSpPr>
+            <a:spLocks xmlns:a="http://schemas.openxmlformats.org/drawingml/2006/main" noGrp="1"/>
+          </p:cNvSpPr>
+          <p:nvPr/>
+        </p:nvSpPr>
+        <p:spPr>
+          <a:xfrm xmlns:a="http://schemas.openxmlformats.org/drawingml/2006/main">
+            <a:off x="1714500" y="4743450"/>
+            <a:ext cx="9525000" cy="809625"/>
           </a:xfrm>
           <a:prstGeom xmlns:a="http://schemas.openxmlformats.org/drawingml/2006/main" prst="rect">
             <a:avLst/>
@@ -8815,7 +8823,7 @@
           <a:lstStyle xmlns:a="http://schemas.openxmlformats.org/drawingml/2006/main"/>
           <a:p xmlns:a="http://schemas.openxmlformats.org/drawingml/2006/main">
             <a:pPr algn="l">
-              <a:defRPr sz="1500" b="1">
+              <a:defRPr sz="1725" b="1">
                 <a:solidFill>
                   <a:srgbClr val="2F785D"/>
                 </a:solidFill>
@@ -8825,7 +8833,7 @@
               </a:defRPr>
             </a:pPr>
             <a:r>
-              <a:rPr sz="1500" b="1">
+              <a:rPr sz="1725" b="1">
                 <a:solidFill>
                   <a:srgbClr val="2F785D"/>
                 </a:solidFill>
@@ -8833,7 +8841,7 @@
                 <a:ea typeface="Arial"/>
                 <a:cs typeface="Arial"/>
               </a:rPr>
-              <a:t>Check the result: Simplify and check by multiplying back.</a:t>
+              <a:t>9/12 = 3/4</a:t>
             </a:r>
           </a:p>
         </p:txBody>
@@ -8841,7 +8849,7 @@
     </p:spTree>
     <p:extLst>
       <p:ext uri="{BB962C8B-B14F-4D97-AF65-F5344CB8AC3E}">
-        <p14:creationId xmlns:p14="http://schemas.microsoft.com/office/powerpoint/2010/main" val="2125903438"/>
+        <p14:creationId xmlns:p14="http://schemas.microsoft.com/office/powerpoint/2010/main" val="1790592404"/>
       </p:ext>
     </p:extLst>
   </p:cSld>
@@ -9134,7 +9142,7 @@
           <p:cNvPr id="15" name="">
             <a:extLst xmlns:a="http://schemas.openxmlformats.org/drawingml/2006/main">
               <a:ext uri="{FF2B5EF4-FFF2-40B4-BE49-F238E27FC236}">
-                <a16:creationId xmlns:a16="http://schemas.microsoft.com/office/drawing/2014/main" id="{1C003DCB-F49F-4485-9A0E-81E8546B6D46}"/>
+                <a16:creationId xmlns:a16="http://schemas.microsoft.com/office/drawing/2014/main" id="{6D26EFAE-4DE2-4BAA-A9B7-26E49E02325F}"/>
               </a:ext>
             </a:extLst>
           </p:cNvPr>
@@ -9166,7 +9174,7 @@
           <p:cNvPr id="2" name="">
             <a:extLst xmlns:a="http://schemas.openxmlformats.org/drawingml/2006/main">
               <a:ext uri="{FF2B5EF4-FFF2-40B4-BE49-F238E27FC236}">
-                <a16:creationId xmlns:a16="http://schemas.microsoft.com/office/drawing/2014/main" id="{C08F1A6E-0C3E-44C7-84D5-08BECA06C8C0}"/>
+                <a16:creationId xmlns:a16="http://schemas.microsoft.com/office/drawing/2014/main" id="{4D8DBFD6-B50C-4C65-ABBB-8EE099AA48AA}"/>
               </a:ext>
             </a:extLst>
           </p:cNvPr>
@@ -9223,7 +9231,7 @@
           <p:cNvPr id="3" name="">
             <a:extLst xmlns:a="http://schemas.openxmlformats.org/drawingml/2006/main">
               <a:ext uri="{FF2B5EF4-FFF2-40B4-BE49-F238E27FC236}">
-                <a16:creationId xmlns:a16="http://schemas.microsoft.com/office/drawing/2014/main" id="{6D583031-E997-4478-A9C5-74C17EE17144}"/>
+                <a16:creationId xmlns:a16="http://schemas.microsoft.com/office/drawing/2014/main" id="{9E6D5E32-018B-4F46-A8BA-D255C4742689}"/>
               </a:ext>
             </a:extLst>
           </p:cNvPr>
@@ -9255,7 +9263,7 @@
           <p:cNvPr id="4" name="">
             <a:extLst xmlns:a="http://schemas.openxmlformats.org/drawingml/2006/main">
               <a:ext uri="{FF2B5EF4-FFF2-40B4-BE49-F238E27FC236}">
-                <a16:creationId xmlns:a16="http://schemas.microsoft.com/office/drawing/2014/main" id="{D8B93C41-C1AA-4191-BEA8-47B539F50543}"/>
+                <a16:creationId xmlns:a16="http://schemas.microsoft.com/office/drawing/2014/main" id="{60D4D7EA-62A9-4FC8-8B49-07B15A6FFF04}"/>
               </a:ext>
             </a:extLst>
           </p:cNvPr>
@@ -9312,7 +9320,7 @@
           <p:cNvPr id="5" name="">
             <a:extLst xmlns:a="http://schemas.openxmlformats.org/drawingml/2006/main">
               <a:ext uri="{FF2B5EF4-FFF2-40B4-BE49-F238E27FC236}">
-                <a16:creationId xmlns:a16="http://schemas.microsoft.com/office/drawing/2014/main" id="{78E81DC1-50D7-4934-BA4E-006048D45C0F}"/>
+                <a16:creationId xmlns:a16="http://schemas.microsoft.com/office/drawing/2014/main" id="{A3869F10-3B9B-422A-8D5F-62634BE16110}"/>
               </a:ext>
             </a:extLst>
           </p:cNvPr>
@@ -9369,7 +9377,7 @@
           <p:cNvPr id="6" name="">
             <a:extLst xmlns:a="http://schemas.openxmlformats.org/drawingml/2006/main">
               <a:ext uri="{FF2B5EF4-FFF2-40B4-BE49-F238E27FC236}">
-                <a16:creationId xmlns:a16="http://schemas.microsoft.com/office/drawing/2014/main" id="{EC8AF18B-ECC5-4866-96C2-9E5CBFB2E97A}"/>
+                <a16:creationId xmlns:a16="http://schemas.microsoft.com/office/drawing/2014/main" id="{85499A79-A213-4231-9204-32AB04AF7827}"/>
               </a:ext>
             </a:extLst>
           </p:cNvPr>
@@ -9426,7 +9434,7 @@
           <p:cNvPr id="7" name="">
             <a:extLst xmlns:a="http://schemas.openxmlformats.org/drawingml/2006/main">
               <a:ext uri="{FF2B5EF4-FFF2-40B4-BE49-F238E27FC236}">
-                <a16:creationId xmlns:a16="http://schemas.microsoft.com/office/drawing/2014/main" id="{5DE28D84-FA4B-4E04-9128-2E26740A6DFB}"/>
+                <a16:creationId xmlns:a16="http://schemas.microsoft.com/office/drawing/2014/main" id="{CB5D6E5E-64F3-4B81-948B-91E081A1FE84}"/>
               </a:ext>
             </a:extLst>
           </p:cNvPr>
@@ -9458,7 +9466,7 @@
           <p:cNvPr id="8" name="">
             <a:extLst xmlns:a="http://schemas.openxmlformats.org/drawingml/2006/main">
               <a:ext uri="{FF2B5EF4-FFF2-40B4-BE49-F238E27FC236}">
-                <a16:creationId xmlns:a16="http://schemas.microsoft.com/office/drawing/2014/main" id="{EDE80B7A-BD9D-4ADC-A59B-F10F8EB1F17D}"/>
+                <a16:creationId xmlns:a16="http://schemas.microsoft.com/office/drawing/2014/main" id="{3B64AC56-C03D-4CDB-B384-A8B6CD03016F}"/>
               </a:ext>
             </a:extLst>
           </p:cNvPr>
@@ -9515,7 +9523,7 @@
           <p:cNvPr id="9" name="">
             <a:extLst xmlns:a="http://schemas.openxmlformats.org/drawingml/2006/main">
               <a:ext uri="{FF2B5EF4-FFF2-40B4-BE49-F238E27FC236}">
-                <a16:creationId xmlns:a16="http://schemas.microsoft.com/office/drawing/2014/main" id="{8E9F87F6-9012-43F9-B8AC-AB02A25F3C72}"/>
+                <a16:creationId xmlns:a16="http://schemas.microsoft.com/office/drawing/2014/main" id="{645F3E8C-CA43-411D-8096-7850394BF4B5}"/>
               </a:ext>
             </a:extLst>
           </p:cNvPr>
@@ -9572,7 +9580,7 @@
           <p:cNvPr id="10" name="">
             <a:extLst xmlns:a="http://schemas.openxmlformats.org/drawingml/2006/main">
               <a:ext uri="{FF2B5EF4-FFF2-40B4-BE49-F238E27FC236}">
-                <a16:creationId xmlns:a16="http://schemas.microsoft.com/office/drawing/2014/main" id="{A1B49CEC-67C0-413B-B629-5FFEA68B867C}"/>
+                <a16:creationId xmlns:a16="http://schemas.microsoft.com/office/drawing/2014/main" id="{7C23D5C8-722E-4D25-A44A-3DA7C2C1BB09}"/>
               </a:ext>
             </a:extLst>
           </p:cNvPr>
@@ -9629,7 +9637,7 @@
           <p:cNvPr id="11" name="">
             <a:extLst xmlns:a="http://schemas.openxmlformats.org/drawingml/2006/main">
               <a:ext uri="{FF2B5EF4-FFF2-40B4-BE49-F238E27FC236}">
-                <a16:creationId xmlns:a16="http://schemas.microsoft.com/office/drawing/2014/main" id="{C9E9CA7B-4E8C-4ADC-805D-02C16DEE6E8C}"/>
+                <a16:creationId xmlns:a16="http://schemas.microsoft.com/office/drawing/2014/main" id="{3C2E5060-F2EF-4EBC-8F32-DF2DA753380E}"/>
               </a:ext>
             </a:extLst>
           </p:cNvPr>
@@ -9686,7 +9694,7 @@
           <p:cNvPr id="12" name="">
             <a:extLst xmlns:a="http://schemas.openxmlformats.org/drawingml/2006/main">
               <a:ext uri="{FF2B5EF4-FFF2-40B4-BE49-F238E27FC236}">
-                <a16:creationId xmlns:a16="http://schemas.microsoft.com/office/drawing/2014/main" id="{F0DA6E70-9DE2-42CD-B21D-32A810C82733}"/>
+                <a16:creationId xmlns:a16="http://schemas.microsoft.com/office/drawing/2014/main" id="{5891E0F9-75B4-46AE-B8EA-E95E5681F8AE}"/>
               </a:ext>
             </a:extLst>
           </p:cNvPr>
@@ -9718,7 +9726,7 @@
           <p:cNvPr id="13" name="">
             <a:extLst xmlns:a="http://schemas.openxmlformats.org/drawingml/2006/main">
               <a:ext uri="{FF2B5EF4-FFF2-40B4-BE49-F238E27FC236}">
-                <a16:creationId xmlns:a16="http://schemas.microsoft.com/office/drawing/2014/main" id="{97C43BD9-490E-4A44-86A1-9B8D321054CC}"/>
+                <a16:creationId xmlns:a16="http://schemas.microsoft.com/office/drawing/2014/main" id="{A6955A4C-08B9-4A14-8FFB-265AFFA4C52C}"/>
               </a:ext>
             </a:extLst>
           </p:cNvPr>
@@ -9775,7 +9783,7 @@
           <p:cNvPr id="14" name="">
             <a:extLst xmlns:a="http://schemas.openxmlformats.org/drawingml/2006/main">
               <a:ext uri="{FF2B5EF4-FFF2-40B4-BE49-F238E27FC236}">
-                <a16:creationId xmlns:a16="http://schemas.microsoft.com/office/drawing/2014/main" id="{C71E9E5A-A43D-4E6C-89CA-C782FCA250D9}"/>
+                <a16:creationId xmlns:a16="http://schemas.microsoft.com/office/drawing/2014/main" id="{CD4FA157-62F3-4708-BE19-06E7BF636445}"/>
               </a:ext>
             </a:extLst>
           </p:cNvPr>
@@ -9830,7 +9838,7 @@
     </p:spTree>
     <p:extLst>
       <p:ext uri="{BB962C8B-B14F-4D97-AF65-F5344CB8AC3E}">
-        <p14:creationId xmlns:p14="http://schemas.microsoft.com/office/powerpoint/2010/main" val="1481686431"/>
+        <p14:creationId xmlns:p14="http://schemas.microsoft.com/office/powerpoint/2010/main" val="1985148644"/>
       </p:ext>
     </p:extLst>
   </p:cSld>
@@ -10031,7 +10039,7 @@
           <p:cNvPr id="16" name="">
             <a:extLst xmlns:a="http://schemas.openxmlformats.org/drawingml/2006/main">
               <a:ext uri="{FF2B5EF4-FFF2-40B4-BE49-F238E27FC236}">
-                <a16:creationId xmlns:a16="http://schemas.microsoft.com/office/drawing/2014/main" id="{09E1952E-8ACA-49C3-BA03-B35A5D8330B3}"/>
+                <a16:creationId xmlns:a16="http://schemas.microsoft.com/office/drawing/2014/main" id="{5DB5341B-6734-4AEB-98FF-47965E3B5643}"/>
               </a:ext>
             </a:extLst>
           </p:cNvPr>
@@ -10063,7 +10071,7 @@
           <p:cNvPr id="2" name="">
             <a:extLst xmlns:a="http://schemas.openxmlformats.org/drawingml/2006/main">
               <a:ext uri="{FF2B5EF4-FFF2-40B4-BE49-F238E27FC236}">
-                <a16:creationId xmlns:a16="http://schemas.microsoft.com/office/drawing/2014/main" id="{41C6D51D-67BB-441F-A2ED-2B140F950235}"/>
+                <a16:creationId xmlns:a16="http://schemas.microsoft.com/office/drawing/2014/main" id="{FA29800A-B1E6-443F-91C3-6D081F8A150A}"/>
               </a:ext>
             </a:extLst>
           </p:cNvPr>
@@ -10120,7 +10128,7 @@
           <p:cNvPr id="3" name="">
             <a:extLst xmlns:a="http://schemas.openxmlformats.org/drawingml/2006/main">
               <a:ext uri="{FF2B5EF4-FFF2-40B4-BE49-F238E27FC236}">
-                <a16:creationId xmlns:a16="http://schemas.microsoft.com/office/drawing/2014/main" id="{613CC649-5577-456F-918D-1E1FC57359CA}"/>
+                <a16:creationId xmlns:a16="http://schemas.microsoft.com/office/drawing/2014/main" id="{877F0CA3-09CF-4866-B978-193928A5CC19}"/>
               </a:ext>
             </a:extLst>
           </p:cNvPr>
@@ -10152,7 +10160,7 @@
           <p:cNvPr id="4" name="">
             <a:extLst xmlns:a="http://schemas.openxmlformats.org/drawingml/2006/main">
               <a:ext uri="{FF2B5EF4-FFF2-40B4-BE49-F238E27FC236}">
-                <a16:creationId xmlns:a16="http://schemas.microsoft.com/office/drawing/2014/main" id="{671AE376-D682-4139-9BD2-9F1D8D820F33}"/>
+                <a16:creationId xmlns:a16="http://schemas.microsoft.com/office/drawing/2014/main" id="{65440538-849E-4DF7-BB47-2758C9CE04C0}"/>
               </a:ext>
             </a:extLst>
           </p:cNvPr>
@@ -10209,7 +10217,7 @@
           <p:cNvPr id="5" name="">
             <a:extLst xmlns:a="http://schemas.openxmlformats.org/drawingml/2006/main">
               <a:ext uri="{FF2B5EF4-FFF2-40B4-BE49-F238E27FC236}">
-                <a16:creationId xmlns:a16="http://schemas.microsoft.com/office/drawing/2014/main" id="{AF219EA3-2AE5-4B39-8115-B8D910C21237}"/>
+                <a16:creationId xmlns:a16="http://schemas.microsoft.com/office/drawing/2014/main" id="{F944CC13-357B-4869-91C4-FBEE71935A34}"/>
               </a:ext>
             </a:extLst>
           </p:cNvPr>
@@ -10266,7 +10274,7 @@
           <p:cNvPr id="6" name="">
             <a:extLst xmlns:a="http://schemas.openxmlformats.org/drawingml/2006/main">
               <a:ext uri="{FF2B5EF4-FFF2-40B4-BE49-F238E27FC236}">
-                <a16:creationId xmlns:a16="http://schemas.microsoft.com/office/drawing/2014/main" id="{2430F841-C8F9-43F2-8A44-86B3EF5BF6D9}"/>
+                <a16:creationId xmlns:a16="http://schemas.microsoft.com/office/drawing/2014/main" id="{4F8F396A-E2C7-44A6-91B7-15B7864C9B77}"/>
               </a:ext>
             </a:extLst>
           </p:cNvPr>
@@ -10323,7 +10331,7 @@
           <p:cNvPr id="7" name="">
             <a:extLst xmlns:a="http://schemas.openxmlformats.org/drawingml/2006/main">
               <a:ext uri="{FF2B5EF4-FFF2-40B4-BE49-F238E27FC236}">
-                <a16:creationId xmlns:a16="http://schemas.microsoft.com/office/drawing/2014/main" id="{38E0231F-DD99-4F09-9328-06CE715C4F96}"/>
+                <a16:creationId xmlns:a16="http://schemas.microsoft.com/office/drawing/2014/main" id="{BF7C4796-A65F-43C6-81E4-3D8CD04AE5A9}"/>
               </a:ext>
             </a:extLst>
           </p:cNvPr>
@@ -10355,7 +10363,7 @@
           <p:cNvPr id="8" name="">
             <a:extLst xmlns:a="http://schemas.openxmlformats.org/drawingml/2006/main">
               <a:ext uri="{FF2B5EF4-FFF2-40B4-BE49-F238E27FC236}">
-                <a16:creationId xmlns:a16="http://schemas.microsoft.com/office/drawing/2014/main" id="{41D321AB-7598-4DE8-861B-A82345EBE4B4}"/>
+                <a16:creationId xmlns:a16="http://schemas.microsoft.com/office/drawing/2014/main" id="{F67EFE00-7179-4A88-9AC0-60A7D6A8BADB}"/>
               </a:ext>
             </a:extLst>
           </p:cNvPr>
@@ -10412,7 +10420,7 @@
           <p:cNvPr id="9" name="">
             <a:extLst xmlns:a="http://schemas.openxmlformats.org/drawingml/2006/main">
               <a:ext uri="{FF2B5EF4-FFF2-40B4-BE49-F238E27FC236}">
-                <a16:creationId xmlns:a16="http://schemas.microsoft.com/office/drawing/2014/main" id="{85A12160-8A12-4F55-AC01-7BA1BEB23C9D}"/>
+                <a16:creationId xmlns:a16="http://schemas.microsoft.com/office/drawing/2014/main" id="{F390BCD9-BA27-4787-88D9-C9D4357E0570}"/>
               </a:ext>
             </a:extLst>
           </p:cNvPr>
@@ -10469,7 +10477,7 @@
           <p:cNvPr id="10" name="">
             <a:extLst xmlns:a="http://schemas.openxmlformats.org/drawingml/2006/main">
               <a:ext uri="{FF2B5EF4-FFF2-40B4-BE49-F238E27FC236}">
-                <a16:creationId xmlns:a16="http://schemas.microsoft.com/office/drawing/2014/main" id="{B0187DB0-5523-4C61-B1A4-C92165D5C462}"/>
+                <a16:creationId xmlns:a16="http://schemas.microsoft.com/office/drawing/2014/main" id="{9F6E4FBD-991A-44F0-94CA-80716122FD14}"/>
               </a:ext>
             </a:extLst>
           </p:cNvPr>
@@ -10526,7 +10534,7 @@
           <p:cNvPr id="11" name="">
             <a:extLst xmlns:a="http://schemas.openxmlformats.org/drawingml/2006/main">
               <a:ext uri="{FF2B5EF4-FFF2-40B4-BE49-F238E27FC236}">
-                <a16:creationId xmlns:a16="http://schemas.microsoft.com/office/drawing/2014/main" id="{1A3D15B4-1D0F-4B43-A699-ABC8F15760C9}"/>
+                <a16:creationId xmlns:a16="http://schemas.microsoft.com/office/drawing/2014/main" id="{F6FB813B-CF91-42E8-9DC5-E1B75A9E840D}"/>
               </a:ext>
             </a:extLst>
           </p:cNvPr>
@@ -10583,7 +10591,7 @@
           <p:cNvPr id="12" name="">
             <a:extLst xmlns:a="http://schemas.openxmlformats.org/drawingml/2006/main">
               <a:ext uri="{FF2B5EF4-FFF2-40B4-BE49-F238E27FC236}">
-                <a16:creationId xmlns:a16="http://schemas.microsoft.com/office/drawing/2014/main" id="{9427703F-182B-4CC8-90B4-B424FA8305B6}"/>
+                <a16:creationId xmlns:a16="http://schemas.microsoft.com/office/drawing/2014/main" id="{C2E71816-3EDA-4D8A-96E7-EE932E5B56E0}"/>
               </a:ext>
             </a:extLst>
           </p:cNvPr>
@@ -10640,7 +10648,7 @@
           <p:cNvPr id="13" name="">
             <a:extLst xmlns:a="http://schemas.openxmlformats.org/drawingml/2006/main">
               <a:ext uri="{FF2B5EF4-FFF2-40B4-BE49-F238E27FC236}">
-                <a16:creationId xmlns:a16="http://schemas.microsoft.com/office/drawing/2014/main" id="{21BBDE1E-7C0F-4179-8225-2D3152D2FD5E}"/>
+                <a16:creationId xmlns:a16="http://schemas.microsoft.com/office/drawing/2014/main" id="{55ACC588-092A-458E-B508-0CDF81F7E6C5}"/>
               </a:ext>
             </a:extLst>
           </p:cNvPr>
@@ -10697,7 +10705,7 @@
           <p:cNvPr id="14" name="">
             <a:extLst xmlns:a="http://schemas.openxmlformats.org/drawingml/2006/main">
               <a:ext uri="{FF2B5EF4-FFF2-40B4-BE49-F238E27FC236}">
-                <a16:creationId xmlns:a16="http://schemas.microsoft.com/office/drawing/2014/main" id="{12A563C8-F4AA-401B-BC7D-3F0001B60825}"/>
+                <a16:creationId xmlns:a16="http://schemas.microsoft.com/office/drawing/2014/main" id="{B57903D2-9D30-482C-8495-03D05658FEA2}"/>
               </a:ext>
             </a:extLst>
           </p:cNvPr>
@@ -10754,7 +10762,7 @@
           <p:cNvPr id="15" name="">
             <a:extLst xmlns:a="http://schemas.openxmlformats.org/drawingml/2006/main">
               <a:ext uri="{FF2B5EF4-FFF2-40B4-BE49-F238E27FC236}">
-                <a16:creationId xmlns:a16="http://schemas.microsoft.com/office/drawing/2014/main" id="{2467C06D-FCA4-4DA4-AF05-6A9BF764B1B1}"/>
+                <a16:creationId xmlns:a16="http://schemas.microsoft.com/office/drawing/2014/main" id="{5C7C5550-C407-4D5E-9367-2C6727FC0AA1}"/>
               </a:ext>
             </a:extLst>
           </p:cNvPr>
@@ -10809,7 +10817,7 @@
     </p:spTree>
     <p:extLst>
       <p:ext uri="{BB962C8B-B14F-4D97-AF65-F5344CB8AC3E}">
-        <p14:creationId xmlns:p14="http://schemas.microsoft.com/office/powerpoint/2010/main" val="1516931320"/>
+        <p14:creationId xmlns:p14="http://schemas.microsoft.com/office/powerpoint/2010/main" val="1464485270"/>
       </p:ext>
     </p:extLst>
   </p:cSld>
@@ -10964,7 +10972,7 @@
           <p:cNvPr id="16" name="">
             <a:extLst xmlns:a="http://schemas.openxmlformats.org/drawingml/2006/main">
               <a:ext uri="{FF2B5EF4-FFF2-40B4-BE49-F238E27FC236}">
-                <a16:creationId xmlns:a16="http://schemas.microsoft.com/office/drawing/2014/main" id="{148DC1A1-6561-41E8-B539-FCD405705FC5}"/>
+                <a16:creationId xmlns:a16="http://schemas.microsoft.com/office/drawing/2014/main" id="{18E8FB1A-F8A5-40E2-8071-D69F64C214C0}"/>
               </a:ext>
             </a:extLst>
           </p:cNvPr>
@@ -10996,7 +11004,7 @@
           <p:cNvPr id="2" name="">
             <a:extLst xmlns:a="http://schemas.openxmlformats.org/drawingml/2006/main">
               <a:ext uri="{FF2B5EF4-FFF2-40B4-BE49-F238E27FC236}">
-                <a16:creationId xmlns:a16="http://schemas.microsoft.com/office/drawing/2014/main" id="{0FD73282-D06A-488D-AA27-37858A236651}"/>
+                <a16:creationId xmlns:a16="http://schemas.microsoft.com/office/drawing/2014/main" id="{6E05A23F-2431-4BBA-9467-E600A57D0F0F}"/>
               </a:ext>
             </a:extLst>
           </p:cNvPr>
@@ -11053,7 +11061,7 @@
           <p:cNvPr id="3" name="">
             <a:extLst xmlns:a="http://schemas.openxmlformats.org/drawingml/2006/main">
               <a:ext uri="{FF2B5EF4-FFF2-40B4-BE49-F238E27FC236}">
-                <a16:creationId xmlns:a16="http://schemas.microsoft.com/office/drawing/2014/main" id="{B5C1EF07-E32F-45E0-AE34-D2C01F086804}"/>
+                <a16:creationId xmlns:a16="http://schemas.microsoft.com/office/drawing/2014/main" id="{9ADAE6FC-E907-45C6-A6E0-D59CEFBF2C33}"/>
               </a:ext>
             </a:extLst>
           </p:cNvPr>
@@ -11085,7 +11093,7 @@
           <p:cNvPr id="4" name="">
             <a:extLst xmlns:a="http://schemas.openxmlformats.org/drawingml/2006/main">
               <a:ext uri="{FF2B5EF4-FFF2-40B4-BE49-F238E27FC236}">
-                <a16:creationId xmlns:a16="http://schemas.microsoft.com/office/drawing/2014/main" id="{7A661E91-9F24-4519-B39A-CD8D3F498C16}"/>
+                <a16:creationId xmlns:a16="http://schemas.microsoft.com/office/drawing/2014/main" id="{7C215AC0-73FF-46BE-971A-84F479B1E6D7}"/>
               </a:ext>
             </a:extLst>
           </p:cNvPr>
@@ -11142,7 +11150,7 @@
           <p:cNvPr id="5" name="">
             <a:extLst xmlns:a="http://schemas.openxmlformats.org/drawingml/2006/main">
               <a:ext uri="{FF2B5EF4-FFF2-40B4-BE49-F238E27FC236}">
-                <a16:creationId xmlns:a16="http://schemas.microsoft.com/office/drawing/2014/main" id="{808F69CC-E8F6-43CB-BBC2-9B7C4C93DBB7}"/>
+                <a16:creationId xmlns:a16="http://schemas.microsoft.com/office/drawing/2014/main" id="{DE69101D-5549-4292-84F0-7CEE4204B3D7}"/>
               </a:ext>
             </a:extLst>
           </p:cNvPr>
@@ -11199,7 +11207,7 @@
           <p:cNvPr id="6" name="">
             <a:extLst xmlns:a="http://schemas.openxmlformats.org/drawingml/2006/main">
               <a:ext uri="{FF2B5EF4-FFF2-40B4-BE49-F238E27FC236}">
-                <a16:creationId xmlns:a16="http://schemas.microsoft.com/office/drawing/2014/main" id="{2264833F-4E7F-40E3-9861-E939E18829F7}"/>
+                <a16:creationId xmlns:a16="http://schemas.microsoft.com/office/drawing/2014/main" id="{8D495CF8-946A-4CFB-817B-64D40CAA0CA9}"/>
               </a:ext>
             </a:extLst>
           </p:cNvPr>
@@ -11256,7 +11264,7 @@
           <p:cNvPr id="7" name="">
             <a:extLst xmlns:a="http://schemas.openxmlformats.org/drawingml/2006/main">
               <a:ext uri="{FF2B5EF4-FFF2-40B4-BE49-F238E27FC236}">
-                <a16:creationId xmlns:a16="http://schemas.microsoft.com/office/drawing/2014/main" id="{EBCA27C1-EB37-4A5D-9081-32710D003351}"/>
+                <a16:creationId xmlns:a16="http://schemas.microsoft.com/office/drawing/2014/main" id="{01CCCC69-24A2-415D-AE07-0C6FB92AA499}"/>
               </a:ext>
             </a:extLst>
           </p:cNvPr>
@@ -11288,7 +11296,7 @@
           <p:cNvPr id="8" name="">
             <a:extLst xmlns:a="http://schemas.openxmlformats.org/drawingml/2006/main">
               <a:ext uri="{FF2B5EF4-FFF2-40B4-BE49-F238E27FC236}">
-                <a16:creationId xmlns:a16="http://schemas.microsoft.com/office/drawing/2014/main" id="{479B3B9A-1AC1-4CCE-9A0C-01F106D68EE7}"/>
+                <a16:creationId xmlns:a16="http://schemas.microsoft.com/office/drawing/2014/main" id="{F1A124A8-84F0-445B-82E9-2B49B7DF32E7}"/>
               </a:ext>
             </a:extLst>
           </p:cNvPr>
@@ -11345,7 +11353,7 @@
           <p:cNvPr id="9" name="">
             <a:extLst xmlns:a="http://schemas.openxmlformats.org/drawingml/2006/main">
               <a:ext uri="{FF2B5EF4-FFF2-40B4-BE49-F238E27FC236}">
-                <a16:creationId xmlns:a16="http://schemas.microsoft.com/office/drawing/2014/main" id="{EB1253B4-2E82-481C-8161-D3B914B317E4}"/>
+                <a16:creationId xmlns:a16="http://schemas.microsoft.com/office/drawing/2014/main" id="{F3F4AC74-30A4-4C4B-BAF4-F71357F4CC28}"/>
               </a:ext>
             </a:extLst>
           </p:cNvPr>
@@ -11406,7 +11414,7 @@
           <p:nvPr/>
         </p:nvPicPr>
         <p:blipFill>
-          <a:blip xmlns:r="http://schemas.openxmlformats.org/officeDocument/2006/relationships" xmlns:a="http://schemas.openxmlformats.org/drawingml/2006/main" r:embed="R784a305ece76435a"/>
+          <a:blip xmlns:r="http://schemas.openxmlformats.org/officeDocument/2006/relationships" xmlns:a="http://schemas.openxmlformats.org/drawingml/2006/main" r:embed="Rc815e10364594f9c"/>
           <a:stretch xmlns:a="http://schemas.openxmlformats.org/drawingml/2006/main"/>
         </p:blipFill>
         <p:spPr>
@@ -11424,7 +11432,7 @@
           <p:cNvPr id="11" name="">
             <a:extLst xmlns:a="http://schemas.openxmlformats.org/drawingml/2006/main">
               <a:ext uri="{FF2B5EF4-FFF2-40B4-BE49-F238E27FC236}">
-                <a16:creationId xmlns:a16="http://schemas.microsoft.com/office/drawing/2014/main" id="{CA9B7295-DA5E-41DB-9F8D-704C5CF343C2}"/>
+                <a16:creationId xmlns:a16="http://schemas.microsoft.com/office/drawing/2014/main" id="{7CB0653B-526D-4F9A-AAF1-687B5D147E12}"/>
               </a:ext>
             </a:extLst>
           </p:cNvPr>
@@ -11481,7 +11489,7 @@
           <p:cNvPr id="12" name="">
             <a:extLst xmlns:a="http://schemas.openxmlformats.org/drawingml/2006/main">
               <a:ext uri="{FF2B5EF4-FFF2-40B4-BE49-F238E27FC236}">
-                <a16:creationId xmlns:a16="http://schemas.microsoft.com/office/drawing/2014/main" id="{5DBF8068-72C1-482D-8B46-54E13152AE70}"/>
+                <a16:creationId xmlns:a16="http://schemas.microsoft.com/office/drawing/2014/main" id="{07AE1D97-F268-4703-BAF3-C73A9D3EDBF0}"/>
               </a:ext>
             </a:extLst>
           </p:cNvPr>
@@ -11538,7 +11546,7 @@
           <p:cNvPr id="13" name="">
             <a:extLst xmlns:a="http://schemas.openxmlformats.org/drawingml/2006/main">
               <a:ext uri="{FF2B5EF4-FFF2-40B4-BE49-F238E27FC236}">
-                <a16:creationId xmlns:a16="http://schemas.microsoft.com/office/drawing/2014/main" id="{9C433386-D1F1-437B-AD88-FCC24C1FE360}"/>
+                <a16:creationId xmlns:a16="http://schemas.microsoft.com/office/drawing/2014/main" id="{0D7D4F0C-6D8D-4B23-BCF4-831BF2E78BF5}"/>
               </a:ext>
             </a:extLst>
           </p:cNvPr>
@@ -11570,7 +11578,7 @@
           <p:cNvPr id="14" name="">
             <a:extLst xmlns:a="http://schemas.openxmlformats.org/drawingml/2006/main">
               <a:ext uri="{FF2B5EF4-FFF2-40B4-BE49-F238E27FC236}">
-                <a16:creationId xmlns:a16="http://schemas.microsoft.com/office/drawing/2014/main" id="{EF085379-12B2-40B3-9780-28CD818F4DC8}"/>
+                <a16:creationId xmlns:a16="http://schemas.microsoft.com/office/drawing/2014/main" id="{775D67F8-7E64-4DDF-B87B-915E74C77082}"/>
               </a:ext>
             </a:extLst>
           </p:cNvPr>
@@ -11627,7 +11635,7 @@
           <p:cNvPr id="15" name="">
             <a:extLst xmlns:a="http://schemas.openxmlformats.org/drawingml/2006/main">
               <a:ext uri="{FF2B5EF4-FFF2-40B4-BE49-F238E27FC236}">
-                <a16:creationId xmlns:a16="http://schemas.microsoft.com/office/drawing/2014/main" id="{018F79BE-BB59-4CC8-8AD7-62C59D8FF8EC}"/>
+                <a16:creationId xmlns:a16="http://schemas.microsoft.com/office/drawing/2014/main" id="{420DA8FF-C7FD-4C93-98C8-C97904902622}"/>
               </a:ext>
             </a:extLst>
           </p:cNvPr>
@@ -11682,7 +11690,7 @@
     </p:spTree>
     <p:extLst>
       <p:ext uri="{BB962C8B-B14F-4D97-AF65-F5344CB8AC3E}">
-        <p14:creationId xmlns:p14="http://schemas.microsoft.com/office/powerpoint/2010/main" val="2137706745"/>
+        <p14:creationId xmlns:p14="http://schemas.microsoft.com/office/powerpoint/2010/main" val="2034754"/>
       </p:ext>
     </p:extLst>
   </p:cSld>
@@ -11837,7 +11845,7 @@
           <p:cNvPr id="23" name="">
             <a:extLst xmlns:a="http://schemas.openxmlformats.org/drawingml/2006/main">
               <a:ext uri="{FF2B5EF4-FFF2-40B4-BE49-F238E27FC236}">
-                <a16:creationId xmlns:a16="http://schemas.microsoft.com/office/drawing/2014/main" id="{6BEC70AA-8F05-499B-97C5-3A1197595F2C}"/>
+                <a16:creationId xmlns:a16="http://schemas.microsoft.com/office/drawing/2014/main" id="{19C40DB8-CEDD-4CD7-B007-F5E6C6A364F4}"/>
               </a:ext>
             </a:extLst>
           </p:cNvPr>
@@ -11869,7 +11877,7 @@
           <p:cNvPr id="2" name="">
             <a:extLst xmlns:a="http://schemas.openxmlformats.org/drawingml/2006/main">
               <a:ext uri="{FF2B5EF4-FFF2-40B4-BE49-F238E27FC236}">
-                <a16:creationId xmlns:a16="http://schemas.microsoft.com/office/drawing/2014/main" id="{001225BD-26A4-4C68-A27D-7FACB97421B3}"/>
+                <a16:creationId xmlns:a16="http://schemas.microsoft.com/office/drawing/2014/main" id="{E4111BF8-A05F-4849-91DB-EFBB5D8A6D76}"/>
               </a:ext>
             </a:extLst>
           </p:cNvPr>
@@ -11926,7 +11934,7 @@
           <p:cNvPr id="3" name="">
             <a:extLst xmlns:a="http://schemas.openxmlformats.org/drawingml/2006/main">
               <a:ext uri="{FF2B5EF4-FFF2-40B4-BE49-F238E27FC236}">
-                <a16:creationId xmlns:a16="http://schemas.microsoft.com/office/drawing/2014/main" id="{8BA9F8AE-B148-43E1-A4AD-88ABBF1CA434}"/>
+                <a16:creationId xmlns:a16="http://schemas.microsoft.com/office/drawing/2014/main" id="{5AE88DF9-7E98-4CCE-8913-BA72A32BDC67}"/>
               </a:ext>
             </a:extLst>
           </p:cNvPr>
@@ -11958,7 +11966,7 @@
           <p:cNvPr id="4" name="">
             <a:extLst xmlns:a="http://schemas.openxmlformats.org/drawingml/2006/main">
               <a:ext uri="{FF2B5EF4-FFF2-40B4-BE49-F238E27FC236}">
-                <a16:creationId xmlns:a16="http://schemas.microsoft.com/office/drawing/2014/main" id="{2F67AB3E-D48E-4F2E-AB9A-BD4FEA127F31}"/>
+                <a16:creationId xmlns:a16="http://schemas.microsoft.com/office/drawing/2014/main" id="{B6A34C4F-B906-4A74-ADA5-6980670215FB}"/>
               </a:ext>
             </a:extLst>
           </p:cNvPr>
@@ -12015,7 +12023,7 @@
           <p:cNvPr id="5" name="">
             <a:extLst xmlns:a="http://schemas.openxmlformats.org/drawingml/2006/main">
               <a:ext uri="{FF2B5EF4-FFF2-40B4-BE49-F238E27FC236}">
-                <a16:creationId xmlns:a16="http://schemas.microsoft.com/office/drawing/2014/main" id="{CF1F6A4B-0DF9-4D1E-8E5B-089D577478F1}"/>
+                <a16:creationId xmlns:a16="http://schemas.microsoft.com/office/drawing/2014/main" id="{A30EB181-FF70-45CB-BA31-D1B83B198C3F}"/>
               </a:ext>
             </a:extLst>
           </p:cNvPr>
@@ -12072,7 +12080,7 @@
           <p:cNvPr id="6" name="">
             <a:extLst xmlns:a="http://schemas.openxmlformats.org/drawingml/2006/main">
               <a:ext uri="{FF2B5EF4-FFF2-40B4-BE49-F238E27FC236}">
-                <a16:creationId xmlns:a16="http://schemas.microsoft.com/office/drawing/2014/main" id="{FC568B48-33EA-4A41-B32A-007FF2C19193}"/>
+                <a16:creationId xmlns:a16="http://schemas.microsoft.com/office/drawing/2014/main" id="{07320797-5DFC-49FE-985E-7BD0E0ADAFFB}"/>
               </a:ext>
             </a:extLst>
           </p:cNvPr>
@@ -12129,7 +12137,7 @@
           <p:cNvPr id="7" name="">
             <a:extLst xmlns:a="http://schemas.openxmlformats.org/drawingml/2006/main">
               <a:ext uri="{FF2B5EF4-FFF2-40B4-BE49-F238E27FC236}">
-                <a16:creationId xmlns:a16="http://schemas.microsoft.com/office/drawing/2014/main" id="{BAC81E66-5F39-47AC-9A84-F2A1B9E48B77}"/>
+                <a16:creationId xmlns:a16="http://schemas.microsoft.com/office/drawing/2014/main" id="{C854B24C-2F69-4873-9354-23E69AD1B28F}"/>
               </a:ext>
             </a:extLst>
           </p:cNvPr>
@@ -12161,7 +12169,7 @@
           <p:cNvPr id="8" name="">
             <a:extLst xmlns:a="http://schemas.openxmlformats.org/drawingml/2006/main">
               <a:ext uri="{FF2B5EF4-FFF2-40B4-BE49-F238E27FC236}">
-                <a16:creationId xmlns:a16="http://schemas.microsoft.com/office/drawing/2014/main" id="{C072C3F9-F4FD-409F-BEDC-3507DB3AE7AF}"/>
+                <a16:creationId xmlns:a16="http://schemas.microsoft.com/office/drawing/2014/main" id="{4FF08E87-E3DC-4CCD-A753-1992D80A6345}"/>
               </a:ext>
             </a:extLst>
           </p:cNvPr>
@@ -12218,7 +12226,7 @@
           <p:cNvPr id="9" name="">
             <a:extLst xmlns:a="http://schemas.openxmlformats.org/drawingml/2006/main">
               <a:ext uri="{FF2B5EF4-FFF2-40B4-BE49-F238E27FC236}">
-                <a16:creationId xmlns:a16="http://schemas.microsoft.com/office/drawing/2014/main" id="{16C055C1-2DFD-433F-92AB-3F9B961FEEB7}"/>
+                <a16:creationId xmlns:a16="http://schemas.microsoft.com/office/drawing/2014/main" id="{0655D7D6-0499-427F-9023-9C717785D85A}"/>
               </a:ext>
             </a:extLst>
           </p:cNvPr>
@@ -12275,7 +12283,7 @@
           <p:cNvPr id="10" name="">
             <a:extLst xmlns:a="http://schemas.openxmlformats.org/drawingml/2006/main">
               <a:ext uri="{FF2B5EF4-FFF2-40B4-BE49-F238E27FC236}">
-                <a16:creationId xmlns:a16="http://schemas.microsoft.com/office/drawing/2014/main" id="{495D014F-B148-42E8-A639-3D084331C3E3}"/>
+                <a16:creationId xmlns:a16="http://schemas.microsoft.com/office/drawing/2014/main" id="{828F17B6-C5A1-4BA1-9246-18DC9242C507}"/>
               </a:ext>
             </a:extLst>
           </p:cNvPr>
@@ -12309,7 +12317,7 @@
           <p:cNvPr id="11" name="">
             <a:extLst xmlns:a="http://schemas.openxmlformats.org/drawingml/2006/main">
               <a:ext uri="{FF2B5EF4-FFF2-40B4-BE49-F238E27FC236}">
-                <a16:creationId xmlns:a16="http://schemas.microsoft.com/office/drawing/2014/main" id="{13294991-8AC7-48A9-9FFE-7C2A5068F2E7}"/>
+                <a16:creationId xmlns:a16="http://schemas.microsoft.com/office/drawing/2014/main" id="{7188ACCD-57F6-42D2-B5F4-9F3A02E12F94}"/>
               </a:ext>
             </a:extLst>
           </p:cNvPr>
@@ -12341,7 +12349,7 @@
           <p:cNvPr id="12" name="">
             <a:extLst xmlns:a="http://schemas.openxmlformats.org/drawingml/2006/main">
               <a:ext uri="{FF2B5EF4-FFF2-40B4-BE49-F238E27FC236}">
-                <a16:creationId xmlns:a16="http://schemas.microsoft.com/office/drawing/2014/main" id="{DDD5C963-A86D-4B2F-996A-99320D97E83D}"/>
+                <a16:creationId xmlns:a16="http://schemas.microsoft.com/office/drawing/2014/main" id="{B49D1D3F-01D3-440E-9E0B-7BE879CE5113}"/>
               </a:ext>
             </a:extLst>
           </p:cNvPr>
@@ -12398,7 +12406,7 @@
           <p:cNvPr id="13" name="">
             <a:extLst xmlns:a="http://schemas.openxmlformats.org/drawingml/2006/main">
               <a:ext uri="{FF2B5EF4-FFF2-40B4-BE49-F238E27FC236}">
-                <a16:creationId xmlns:a16="http://schemas.microsoft.com/office/drawing/2014/main" id="{93ABEC3A-0187-492A-BAC1-60DB8DA866DE}"/>
+                <a16:creationId xmlns:a16="http://schemas.microsoft.com/office/drawing/2014/main" id="{5CFED55A-33D4-42E4-BFA4-C88E0DF334EB}"/>
               </a:ext>
             </a:extLst>
           </p:cNvPr>
@@ -12455,7 +12463,7 @@
           <p:cNvPr id="14" name="">
             <a:extLst xmlns:a="http://schemas.openxmlformats.org/drawingml/2006/main">
               <a:ext uri="{FF2B5EF4-FFF2-40B4-BE49-F238E27FC236}">
-                <a16:creationId xmlns:a16="http://schemas.microsoft.com/office/drawing/2014/main" id="{27BF2EDC-71A5-42E5-B70D-7345C3A0C617}"/>
+                <a16:creationId xmlns:a16="http://schemas.microsoft.com/office/drawing/2014/main" id="{E00F95B8-AF43-41A5-9CA8-DAA698146978}"/>
               </a:ext>
             </a:extLst>
           </p:cNvPr>
@@ -12489,7 +12497,7 @@
           <p:cNvPr id="15" name="">
             <a:extLst xmlns:a="http://schemas.openxmlformats.org/drawingml/2006/main">
               <a:ext uri="{FF2B5EF4-FFF2-40B4-BE49-F238E27FC236}">
-                <a16:creationId xmlns:a16="http://schemas.microsoft.com/office/drawing/2014/main" id="{BC3078CF-7E8D-45EE-9027-8D508C00C27E}"/>
+                <a16:creationId xmlns:a16="http://schemas.microsoft.com/office/drawing/2014/main" id="{7A9F98F7-8E9D-4C50-A91E-720A168F4E30}"/>
               </a:ext>
             </a:extLst>
           </p:cNvPr>
@@ -12521,7 +12529,7 @@
           <p:cNvPr id="16" name="">
             <a:extLst xmlns:a="http://schemas.openxmlformats.org/drawingml/2006/main">
               <a:ext uri="{FF2B5EF4-FFF2-40B4-BE49-F238E27FC236}">
-                <a16:creationId xmlns:a16="http://schemas.microsoft.com/office/drawing/2014/main" id="{1A08F5F1-89B0-43F4-A871-25A4925FD2B7}"/>
+                <a16:creationId xmlns:a16="http://schemas.microsoft.com/office/drawing/2014/main" id="{40DC94B8-20BD-495C-AFBE-370BF82EB42B}"/>
               </a:ext>
             </a:extLst>
           </p:cNvPr>
@@ -12578,7 +12586,7 @@
           <p:cNvPr id="17" name="">
             <a:extLst xmlns:a="http://schemas.openxmlformats.org/drawingml/2006/main">
               <a:ext uri="{FF2B5EF4-FFF2-40B4-BE49-F238E27FC236}">
-                <a16:creationId xmlns:a16="http://schemas.microsoft.com/office/drawing/2014/main" id="{41FA5E38-FAA6-4580-B217-C368CAB92027}"/>
+                <a16:creationId xmlns:a16="http://schemas.microsoft.com/office/drawing/2014/main" id="{F2232C09-58C7-4FB0-B860-42F55F28CCA7}"/>
               </a:ext>
             </a:extLst>
           </p:cNvPr>
@@ -12635,7 +12643,7 @@
           <p:cNvPr id="18" name="">
             <a:extLst xmlns:a="http://schemas.openxmlformats.org/drawingml/2006/main">
               <a:ext uri="{FF2B5EF4-FFF2-40B4-BE49-F238E27FC236}">
-                <a16:creationId xmlns:a16="http://schemas.microsoft.com/office/drawing/2014/main" id="{9669DF75-0E5D-4B35-AECA-ECBA17383FCD}"/>
+                <a16:creationId xmlns:a16="http://schemas.microsoft.com/office/drawing/2014/main" id="{32494044-3303-4DE0-A095-1B6F1735CA32}"/>
               </a:ext>
             </a:extLst>
           </p:cNvPr>
@@ -12669,7 +12677,7 @@
           <p:cNvPr id="19" name="">
             <a:extLst xmlns:a="http://schemas.openxmlformats.org/drawingml/2006/main">
               <a:ext uri="{FF2B5EF4-FFF2-40B4-BE49-F238E27FC236}">
-                <a16:creationId xmlns:a16="http://schemas.microsoft.com/office/drawing/2014/main" id="{DBF10007-14D3-4C44-8B34-3257237297BC}"/>
+                <a16:creationId xmlns:a16="http://schemas.microsoft.com/office/drawing/2014/main" id="{A7F5913B-F21B-43B9-B9E5-359B900EF0EC}"/>
               </a:ext>
             </a:extLst>
           </p:cNvPr>
@@ -12701,7 +12709,7 @@
           <p:cNvPr id="20" name="">
             <a:extLst xmlns:a="http://schemas.openxmlformats.org/drawingml/2006/main">
               <a:ext uri="{FF2B5EF4-FFF2-40B4-BE49-F238E27FC236}">
-                <a16:creationId xmlns:a16="http://schemas.microsoft.com/office/drawing/2014/main" id="{0DF48D3B-58FC-4A3E-BF11-DE4929B7828E}"/>
+                <a16:creationId xmlns:a16="http://schemas.microsoft.com/office/drawing/2014/main" id="{1763F320-9AEF-4167-9556-194C849870CD}"/>
               </a:ext>
             </a:extLst>
           </p:cNvPr>
@@ -12758,7 +12766,7 @@
           <p:cNvPr id="21" name="">
             <a:extLst xmlns:a="http://schemas.openxmlformats.org/drawingml/2006/main">
               <a:ext uri="{FF2B5EF4-FFF2-40B4-BE49-F238E27FC236}">
-                <a16:creationId xmlns:a16="http://schemas.microsoft.com/office/drawing/2014/main" id="{4ECCD768-7A46-4D52-B821-1A479B9986BB}"/>
+                <a16:creationId xmlns:a16="http://schemas.microsoft.com/office/drawing/2014/main" id="{5E928C8D-1A9C-4A6C-BCFE-E2D430EBC0FF}"/>
               </a:ext>
             </a:extLst>
           </p:cNvPr>
@@ -12815,7 +12823,7 @@
           <p:cNvPr id="22" name="">
             <a:extLst xmlns:a="http://schemas.openxmlformats.org/drawingml/2006/main">
               <a:ext uri="{FF2B5EF4-FFF2-40B4-BE49-F238E27FC236}">
-                <a16:creationId xmlns:a16="http://schemas.microsoft.com/office/drawing/2014/main" id="{D2A76F13-A7AC-412C-9262-0ADC3B1FD5E5}"/>
+                <a16:creationId xmlns:a16="http://schemas.microsoft.com/office/drawing/2014/main" id="{79E00195-6622-4DEC-B5BD-96EE311064BB}"/>
               </a:ext>
             </a:extLst>
           </p:cNvPr>
@@ -12870,7 +12878,7 @@
     </p:spTree>
     <p:extLst>
       <p:ext uri="{BB962C8B-B14F-4D97-AF65-F5344CB8AC3E}">
-        <p14:creationId xmlns:p14="http://schemas.microsoft.com/office/powerpoint/2010/main" val="29213513"/>
+        <p14:creationId xmlns:p14="http://schemas.microsoft.com/office/powerpoint/2010/main" val="1087048494"/>
       </p:ext>
     </p:extLst>
   </p:cSld>
@@ -13071,7 +13079,7 @@
           <p:cNvPr id="22" name="">
             <a:extLst xmlns:a="http://schemas.openxmlformats.org/drawingml/2006/main">
               <a:ext uri="{FF2B5EF4-FFF2-40B4-BE49-F238E27FC236}">
-                <a16:creationId xmlns:a16="http://schemas.microsoft.com/office/drawing/2014/main" id="{2428988C-0CC3-42AC-A861-5783A21DEBD7}"/>
+                <a16:creationId xmlns:a16="http://schemas.microsoft.com/office/drawing/2014/main" id="{625EF532-2FE5-489F-A51D-F8BD940C10A9}"/>
               </a:ext>
             </a:extLst>
           </p:cNvPr>
@@ -13103,7 +13111,7 @@
           <p:cNvPr id="2" name="">
             <a:extLst xmlns:a="http://schemas.openxmlformats.org/drawingml/2006/main">
               <a:ext uri="{FF2B5EF4-FFF2-40B4-BE49-F238E27FC236}">
-                <a16:creationId xmlns:a16="http://schemas.microsoft.com/office/drawing/2014/main" id="{107D5DAF-4CA2-4E4C-8722-70441811B938}"/>
+                <a16:creationId xmlns:a16="http://schemas.microsoft.com/office/drawing/2014/main" id="{CD81B01C-CF87-46ED-B5F0-0589D3F8B77F}"/>
               </a:ext>
             </a:extLst>
           </p:cNvPr>
@@ -13160,7 +13168,7 @@
           <p:cNvPr id="3" name="">
             <a:extLst xmlns:a="http://schemas.openxmlformats.org/drawingml/2006/main">
               <a:ext uri="{FF2B5EF4-FFF2-40B4-BE49-F238E27FC236}">
-                <a16:creationId xmlns:a16="http://schemas.microsoft.com/office/drawing/2014/main" id="{5676DE02-2F62-4978-8BDA-C43AEE39437C}"/>
+                <a16:creationId xmlns:a16="http://schemas.microsoft.com/office/drawing/2014/main" id="{57E1922F-1A35-43FA-99FF-2F28D1CB9C9E}"/>
               </a:ext>
             </a:extLst>
           </p:cNvPr>
@@ -13192,7 +13200,7 @@
           <p:cNvPr id="4" name="">
             <a:extLst xmlns:a="http://schemas.openxmlformats.org/drawingml/2006/main">
               <a:ext uri="{FF2B5EF4-FFF2-40B4-BE49-F238E27FC236}">
-                <a16:creationId xmlns:a16="http://schemas.microsoft.com/office/drawing/2014/main" id="{B8BF6635-294D-456E-81A5-45C89E72ED8C}"/>
+                <a16:creationId xmlns:a16="http://schemas.microsoft.com/office/drawing/2014/main" id="{2A17AE68-59D0-4E05-9AB5-DAE9FF0B6F70}"/>
               </a:ext>
             </a:extLst>
           </p:cNvPr>
@@ -13249,7 +13257,7 @@
           <p:cNvPr id="5" name="">
             <a:extLst xmlns:a="http://schemas.openxmlformats.org/drawingml/2006/main">
               <a:ext uri="{FF2B5EF4-FFF2-40B4-BE49-F238E27FC236}">
-                <a16:creationId xmlns:a16="http://schemas.microsoft.com/office/drawing/2014/main" id="{2E3D1296-ED21-462A-A94F-2861739A32E1}"/>
+                <a16:creationId xmlns:a16="http://schemas.microsoft.com/office/drawing/2014/main" id="{57CB7B16-8A37-4335-82DE-F78DE3F767A8}"/>
               </a:ext>
             </a:extLst>
           </p:cNvPr>
@@ -13306,7 +13314,7 @@
           <p:cNvPr id="6" name="">
             <a:extLst xmlns:a="http://schemas.openxmlformats.org/drawingml/2006/main">
               <a:ext uri="{FF2B5EF4-FFF2-40B4-BE49-F238E27FC236}">
-                <a16:creationId xmlns:a16="http://schemas.microsoft.com/office/drawing/2014/main" id="{7AD8DE97-7F4D-40E6-8F9B-DF37F9357492}"/>
+                <a16:creationId xmlns:a16="http://schemas.microsoft.com/office/drawing/2014/main" id="{C3A18EF2-D208-46A5-9FBC-545F5CC3BAAA}"/>
               </a:ext>
             </a:extLst>
           </p:cNvPr>
@@ -13363,7 +13371,7 @@
           <p:cNvPr id="7" name="">
             <a:extLst xmlns:a="http://schemas.openxmlformats.org/drawingml/2006/main">
               <a:ext uri="{FF2B5EF4-FFF2-40B4-BE49-F238E27FC236}">
-                <a16:creationId xmlns:a16="http://schemas.microsoft.com/office/drawing/2014/main" id="{C1AEDF1D-A966-465D-A565-44E9B7BC8288}"/>
+                <a16:creationId xmlns:a16="http://schemas.microsoft.com/office/drawing/2014/main" id="{6C761996-F294-420E-9873-F67DD52EF518}"/>
               </a:ext>
             </a:extLst>
           </p:cNvPr>
@@ -13395,7 +13403,7 @@
           <p:cNvPr id="8" name="">
             <a:extLst xmlns:a="http://schemas.openxmlformats.org/drawingml/2006/main">
               <a:ext uri="{FF2B5EF4-FFF2-40B4-BE49-F238E27FC236}">
-                <a16:creationId xmlns:a16="http://schemas.microsoft.com/office/drawing/2014/main" id="{D767EF62-8B45-4B67-B2A4-D7678C0FD82B}"/>
+                <a16:creationId xmlns:a16="http://schemas.microsoft.com/office/drawing/2014/main" id="{9BA54732-8BC9-422E-A826-D9A884969CB5}"/>
               </a:ext>
             </a:extLst>
           </p:cNvPr>
@@ -13452,7 +13460,7 @@
           <p:cNvPr id="9" name="">
             <a:extLst xmlns:a="http://schemas.openxmlformats.org/drawingml/2006/main">
               <a:ext uri="{FF2B5EF4-FFF2-40B4-BE49-F238E27FC236}">
-                <a16:creationId xmlns:a16="http://schemas.microsoft.com/office/drawing/2014/main" id="{232758F2-5D5E-4048-823E-A798099AA164}"/>
+                <a16:creationId xmlns:a16="http://schemas.microsoft.com/office/drawing/2014/main" id="{048DE7FE-F7ED-4C17-9DB6-5674634EE142}"/>
               </a:ext>
             </a:extLst>
           </p:cNvPr>
@@ -13509,7 +13517,7 @@
           <p:cNvPr id="10" name="">
             <a:extLst xmlns:a="http://schemas.openxmlformats.org/drawingml/2006/main">
               <a:ext uri="{FF2B5EF4-FFF2-40B4-BE49-F238E27FC236}">
-                <a16:creationId xmlns:a16="http://schemas.microsoft.com/office/drawing/2014/main" id="{4DA7CB08-C5A4-401A-9FFB-85D6C331A62A}"/>
+                <a16:creationId xmlns:a16="http://schemas.microsoft.com/office/drawing/2014/main" id="{3313E67D-8050-4CB0-B45E-95677B627631}"/>
               </a:ext>
             </a:extLst>
           </p:cNvPr>
@@ -13543,7 +13551,7 @@
           <p:cNvPr id="11" name="">
             <a:extLst xmlns:a="http://schemas.openxmlformats.org/drawingml/2006/main">
               <a:ext uri="{FF2B5EF4-FFF2-40B4-BE49-F238E27FC236}">
-                <a16:creationId xmlns:a16="http://schemas.microsoft.com/office/drawing/2014/main" id="{706EA239-696A-4B0A-9974-8FB71A2A944E}"/>
+                <a16:creationId xmlns:a16="http://schemas.microsoft.com/office/drawing/2014/main" id="{80D16E07-ECF5-40EC-AEC6-36F5117D1B33}"/>
               </a:ext>
             </a:extLst>
           </p:cNvPr>
@@ -13575,7 +13583,7 @@
           <p:cNvPr id="12" name="">
             <a:extLst xmlns:a="http://schemas.openxmlformats.org/drawingml/2006/main">
               <a:ext uri="{FF2B5EF4-FFF2-40B4-BE49-F238E27FC236}">
-                <a16:creationId xmlns:a16="http://schemas.microsoft.com/office/drawing/2014/main" id="{19B47168-72DE-4369-9DB1-650C1D73A4B4}"/>
+                <a16:creationId xmlns:a16="http://schemas.microsoft.com/office/drawing/2014/main" id="{2526422D-E8FA-4C09-8A21-853506ABB1C8}"/>
               </a:ext>
             </a:extLst>
           </p:cNvPr>
@@ -13632,7 +13640,7 @@
           <p:cNvPr id="13" name="">
             <a:extLst xmlns:a="http://schemas.openxmlformats.org/drawingml/2006/main">
               <a:ext uri="{FF2B5EF4-FFF2-40B4-BE49-F238E27FC236}">
-                <a16:creationId xmlns:a16="http://schemas.microsoft.com/office/drawing/2014/main" id="{F478EE6A-3199-471A-97EC-B24F790C53BB}"/>
+                <a16:creationId xmlns:a16="http://schemas.microsoft.com/office/drawing/2014/main" id="{BCC1EB4A-C0D8-4C69-A49C-6CDF0C5677BA}"/>
               </a:ext>
             </a:extLst>
           </p:cNvPr>
@@ -13689,7 +13697,7 @@
           <p:cNvPr id="14" name="">
             <a:extLst xmlns:a="http://schemas.openxmlformats.org/drawingml/2006/main">
               <a:ext uri="{FF2B5EF4-FFF2-40B4-BE49-F238E27FC236}">
-                <a16:creationId xmlns:a16="http://schemas.microsoft.com/office/drawing/2014/main" id="{2456F703-5011-4CDB-8D12-5CF9406E1607}"/>
+                <a16:creationId xmlns:a16="http://schemas.microsoft.com/office/drawing/2014/main" id="{16661EA0-1487-41B6-8EB0-93E1AEE01D40}"/>
               </a:ext>
             </a:extLst>
           </p:cNvPr>
@@ -13723,7 +13731,7 @@
           <p:cNvPr id="15" name="">
             <a:extLst xmlns:a="http://schemas.openxmlformats.org/drawingml/2006/main">
               <a:ext uri="{FF2B5EF4-FFF2-40B4-BE49-F238E27FC236}">
-                <a16:creationId xmlns:a16="http://schemas.microsoft.com/office/drawing/2014/main" id="{5E561114-B21B-43B6-A427-A4EE4DDC84B2}"/>
+                <a16:creationId xmlns:a16="http://schemas.microsoft.com/office/drawing/2014/main" id="{67264848-FEB9-49D0-B988-86A2C8BE769E}"/>
               </a:ext>
             </a:extLst>
           </p:cNvPr>
@@ -13755,7 +13763,7 @@
           <p:cNvPr id="16" name="">
             <a:extLst xmlns:a="http://schemas.openxmlformats.org/drawingml/2006/main">
               <a:ext uri="{FF2B5EF4-FFF2-40B4-BE49-F238E27FC236}">
-                <a16:creationId xmlns:a16="http://schemas.microsoft.com/office/drawing/2014/main" id="{430F5019-680F-4430-8140-01014D574CCB}"/>
+                <a16:creationId xmlns:a16="http://schemas.microsoft.com/office/drawing/2014/main" id="{F60C8946-5B80-49B4-B219-02A44D25205C}"/>
               </a:ext>
             </a:extLst>
           </p:cNvPr>
@@ -13812,7 +13820,7 @@
           <p:cNvPr id="17" name="">
             <a:extLst xmlns:a="http://schemas.openxmlformats.org/drawingml/2006/main">
               <a:ext uri="{FF2B5EF4-FFF2-40B4-BE49-F238E27FC236}">
-                <a16:creationId xmlns:a16="http://schemas.microsoft.com/office/drawing/2014/main" id="{69BBA15F-27F6-4E59-83BF-1330795836EB}"/>
+                <a16:creationId xmlns:a16="http://schemas.microsoft.com/office/drawing/2014/main" id="{DC7BD878-55A5-43E5-86A0-9C04729531D4}"/>
               </a:ext>
             </a:extLst>
           </p:cNvPr>
@@ -13869,7 +13877,7 @@
           <p:cNvPr id="18" name="">
             <a:extLst xmlns:a="http://schemas.openxmlformats.org/drawingml/2006/main">
               <a:ext uri="{FF2B5EF4-FFF2-40B4-BE49-F238E27FC236}">
-                <a16:creationId xmlns:a16="http://schemas.microsoft.com/office/drawing/2014/main" id="{CD113F07-EC2C-47F3-BF5F-D619C22E95C6}"/>
+                <a16:creationId xmlns:a16="http://schemas.microsoft.com/office/drawing/2014/main" id="{EA24E6A1-07DD-41CE-A1FF-358C8D846425}"/>
               </a:ext>
             </a:extLst>
           </p:cNvPr>
@@ -13903,7 +13911,7 @@
           <p:cNvPr id="19" name="">
             <a:extLst xmlns:a="http://schemas.openxmlformats.org/drawingml/2006/main">
               <a:ext uri="{FF2B5EF4-FFF2-40B4-BE49-F238E27FC236}">
-                <a16:creationId xmlns:a16="http://schemas.microsoft.com/office/drawing/2014/main" id="{37679C44-34D2-4ECB-A1FA-6C9CC337D14D}"/>
+                <a16:creationId xmlns:a16="http://schemas.microsoft.com/office/drawing/2014/main" id="{D64CA9F3-FC51-4D1B-83FA-46CF4FAB62EC}"/>
               </a:ext>
             </a:extLst>
           </p:cNvPr>
@@ -13935,7 +13943,7 @@
           <p:cNvPr id="20" name="">
             <a:extLst xmlns:a="http://schemas.openxmlformats.org/drawingml/2006/main">
               <a:ext uri="{FF2B5EF4-FFF2-40B4-BE49-F238E27FC236}">
-                <a16:creationId xmlns:a16="http://schemas.microsoft.com/office/drawing/2014/main" id="{C5785764-1D4E-4C8E-84D8-A187E5659E11}"/>
+                <a16:creationId xmlns:a16="http://schemas.microsoft.com/office/drawing/2014/main" id="{95553AF3-3AB5-4FCB-A319-1CEA8275709C}"/>
               </a:ext>
             </a:extLst>
           </p:cNvPr>
@@ -13992,7 +14000,7 @@
           <p:cNvPr id="21" name="">
             <a:extLst xmlns:a="http://schemas.openxmlformats.org/drawingml/2006/main">
               <a:ext uri="{FF2B5EF4-FFF2-40B4-BE49-F238E27FC236}">
-                <a16:creationId xmlns:a16="http://schemas.microsoft.com/office/drawing/2014/main" id="{B79CA757-8819-4797-A5DD-AE73FB8B7C51}"/>
+                <a16:creationId xmlns:a16="http://schemas.microsoft.com/office/drawing/2014/main" id="{B519969A-C0C4-4D2D-960A-E974B1C83698}"/>
               </a:ext>
             </a:extLst>
           </p:cNvPr>
@@ -14047,7 +14055,7 @@
     </p:spTree>
     <p:extLst>
       <p:ext uri="{BB962C8B-B14F-4D97-AF65-F5344CB8AC3E}">
-        <p14:creationId xmlns:p14="http://schemas.microsoft.com/office/powerpoint/2010/main" val="481505220"/>
+        <p14:creationId xmlns:p14="http://schemas.microsoft.com/office/powerpoint/2010/main" val="1734067534"/>
       </p:ext>
     </p:extLst>
   </p:cSld>
